--- a/docs/links-26/presentations/In-Step-for-managers.pptx
+++ b/docs/links-26/presentations/In-Step-for-managers.pptx
@@ -1458,7 +1458,7 @@
           <a:p>
             <a:r>
               <a:rPr lang="en-US" dirty="0"/>
-              <a:t>This is the case in one slide. In Step came after the shortlist (30 October 2026): Closing Time’s weeks with the shift times chosen again, to put five on at every opening Monday to Saturday and to follow the weekday trains more closely. It meets every December staffing rule and all three flexible ones. Nine of its fifteen shift times are worked today, today’s 13:45 finish among them on every weekday. Nobody works more than five days in a row on the fixed rota, where today it is seven; a cover week placed badly can make it six, never more. Every working week is all earlies or all lates, and 18 of the 21 keep one shift time Monday to Friday, where today it is seven weeks in 16. Its seven full weekends off in 26 weeks are never more than five weeks apart, which is as close as the five cover weeks allow; today it is four in 20, up to seven weeks apart. Its working weeks run from 25h 30m to 41h 05m (today 25h 10m to 43h 50m), and the shortest rest is 14h 35m. Against the four shortlisted links it has the closest fit to the trains across the week and the lightest heaviest week, and is worse than all four on nothing the shortlist sheet compares. The honest costs: finishes at 23:00 or later go from about 39 to 42 a year each, the smallest rise possible — the December staffing needs three to the close every day, and only those three finish after 23:00 — and finishes at 22:00 or later from about 78 to 94; two new weekday earlies are longer than any early today; and six shift times are new. Every closing shift is 30 to 60 minutes shorter.</a:t>
+              <a:t>This is the case in one slide. In Step came after the shortlist (30 October 2026) and is not on it: Closing Time’s weeks with the shift times chosen again, to put five on at every opening Monday to Saturday and to follow the weekday trains more closely, so this slide sets it beside the four shortlisted links. It meets every December staffing rule and all three flexible ones. Nine of its fifteen shift times are worked today, today’s 13:45 finish among them on every weekday. Nobody works more than five days in a row on the fixed rota, where today it is seven; a cover week placed badly can make it six, never more. Every working week is all earlies or all lates, and 18 of the 21 keep one shift time Monday to Friday, where today it is seven weeks in 16. Its seven full weekends off in 26 weeks are never more than five weeks apart, which is as close as the five cover weeks allow; today it is four in 20, up to seven weeks apart. Its working weeks run from 25h 30m to 41h 05m (today 25h 10m to 43h 50m), and the shortest rest is 14h 35m. Of the five it is the only one with both today’s 13:45 and five at the Saturday open, and its heaviest week is the lightest. Its fit to the trains is the closest of the five with the three days’ scores added together; weighted by the days of a week, two of the four are a shade closer (26.7 against 26.8), and on weekdays alone three are. The honest costs: its two new weekday earlies are 8h 55m and 8h 45m, about 40 a year each, where today no early is over 8h 30m and none of the four shortlisted links has more than 20; finishes at 23:00 or later go from about 39 to 42 a year each, the smallest rise possible — the December staffing needs three to the close every day, and only those three finish after 23:00 — and finishes at 22:00 or later from about 78 to 94; and six shift times are new. Against Closing Time, whose weeks it keeps, it also gives up a quarter of an hour on the closers (8h 10m, not 7h 55m), a sixth new shift time, a little of the Saturday fit (9.6, not 8.7) and some evenness (its lightest week 25h 30m, not 27h 00m). Every closing shift is 30 to 60 minutes shorter than today’s.</a:t>
             </a:r>
             <a:endParaRPr lang="en-US" dirty="0"/>
           </a:p>
@@ -1546,7 +1546,7 @@
           <a:p>
             <a:r>
               <a:rPr lang="en-US" dirty="0"/>
-              <a:t>Days at work stay at 219 a year (218.6 exactly; Monday to Saturday; Sunday is overtime), under the ceiling agreed on 1 October 2026. Late finishes average about three more a year each, all of them from the December staffing — three to the close every day, where today’s weekdays have two — so no link meeting the same rules on 26 weeks could have fewer. Full weekends off are seven in 26 and never more than five weeks apart; nobody works more than five days in a row on the fixed rota; no week mixes earlies and lates, and 18 of the 21 working weeks keep one shift time. Weekly hours run from 25h 30m to 41h 05m (today 25h 10m to 43h 50m); only the average is the contract. The average shift is about two minutes longer.</a:t>
+              <a:t>Days at work stay at 219 a year (218.6 exactly; Monday to Saturday; Sunday is overtime), under the ceiling agreed on 1 October 2026. Late finishes average about three more a year each, all of them from the December staffing — three to the close every day, where today’s weekdays have two — so no link meeting the same rules on 26 weeks could have fewer. Full weekends off are seven in 26 and never more than five weeks apart; nobody works more than five days in a row on the fixed rota; no week mixes earlies and lates, and 18 of the 21 working weeks keep one shift time. Weekly hours run from 25h 30m to 41h 05m (today 25h 10m to 43h 50m); only the average is the contract. Two new weekday earlies, 06:20–15:15 and 07:00–15:45, are 8h 55m and 8h 45m, about 40 a year each, where today no early is over 8h 30m. The average shift is about two minutes longer.</a:t>
             </a:r>
             <a:endParaRPr lang="en-US" dirty="0"/>
           </a:p>
@@ -6765,7 +6765,7 @@
                 <a:ea typeface="Inter" pitchFamily="34" charset="-122"/>
                 <a:cs typeface="Inter" pitchFamily="34" charset="-120"/>
               </a:rPr>
-              <a:t>This one adds: the closest fit to the trains overall, and no week over 41h 05m</a:t>
+              <a:t>This one adds: today’s 13:45, five at the Saturday open, no week over 41h 05m</a:t>
             </a:r>
             <a:endParaRPr lang="en-US" sz="1500" dirty="0"/>
           </a:p>
@@ -6868,7 +6868,7 @@
                 <a:ea typeface="Inter" pitchFamily="34" charset="-122"/>
                 <a:cs typeface="Inter" pitchFamily="34" charset="-120"/>
               </a:rPr>
-              <a:t>9 of 15 shift times worked today, 6 new; today’s 13:45 finish kept every weekday</a:t>
+              <a:t>9 of 15 shift times worked today; 6 new, three shorter versions of today’s lates</a:t>
             </a:r>
             <a:endParaRPr lang="en-US" sz="1500" dirty="0"/>
           </a:p>
@@ -6971,7 +6971,7 @@
                 <a:ea typeface="Inter" pitchFamily="34" charset="-122"/>
                 <a:cs typeface="Inter" pitchFamily="34" charset="-120"/>
               </a:rPr>
-              <a:t>Costs: 94 finishes at 22:00 or later (today 78); four weeks off 15 days, not 14</a:t>
+              <a:t>Costs: weekday earlies to 8h 55m (today 8h 30m); four weeks off 15 days, not 14</a:t>
             </a:r>
             <a:endParaRPr lang="en-US" sz="1500" dirty="0"/>
           </a:p>
@@ -7588,7 +7588,7 @@
                 <a:ea typeface="Inter" pitchFamily="34" charset="-122"/>
                 <a:cs typeface="Inter" pitchFamily="34" charset="-120"/>
               </a:rPr>
-              <a:t>Average shift about 2 minutes longer</a:t>
+              <a:t>Longer weekday earlies, up to 8h 55m</a:t>
             </a:r>
             <a:endParaRPr lang="en-US" sz="1300" dirty="0"/>
           </a:p>

--- a/docs/links-26/presentations/In-Step-for-managers.pptx
+++ b/docs/links-26/presentations/In-Step-for-managers.pptx
@@ -1458,7 +1458,7 @@
           <a:p>
             <a:r>
               <a:rPr lang="en-US" dirty="0"/>
-              <a:t>This is the case in one slide. In Step came after the shortlist (30 October 2026) and is not on it: Closing Time’s weeks with the shift times chosen again, to put five on at every opening Monday to Saturday and to follow the weekday trains more closely, so this slide sets it beside the four shortlisted links. It meets every December staffing rule and all three flexible ones. Nine of its fifteen shift times are worked today, today’s 13:45 finish among them on every weekday. Nobody works more than five days in a row on the fixed rota, where today it is seven; a cover week placed badly can make it six, never more. Every working week is all earlies or all lates, and 18 of the 21 keep one shift time Monday to Friday, where today it is seven weeks in 16. Its seven full weekends off in 26 weeks are never more than five weeks apart, which is as close as the five cover weeks allow; today it is four in 20, up to seven weeks apart. Its working weeks run from 25h 30m to 41h 05m (today 25h 10m to 43h 50m), and the shortest rest is 14h 35m. Of the five it is the only one with both today’s 13:45 and five at the Saturday open, and its heaviest week is the lightest. Its fit to the trains is the closest of the five with the three days’ scores added together; weighted by the days of a week, two of the four are a shade closer (26.7 against 26.8), and on weekdays alone three are. The honest costs: its two new weekday earlies are 8h 55m and 8h 45m, about 40 a year each, where today no early is over 8h 30m and none of the four shortlisted links has more than 20; finishes at 23:00 or later go from about 39 to 42 a year each, the smallest rise possible — the December staffing needs three to the close every day, and only those three finish after 23:00 — and finishes at 22:00 or later from about 78 to 94; and six shift times are new. Against Closing Time, whose weeks it keeps, it also gives up a quarter of an hour on the closers (8h 10m, not 7h 55m), a sixth new shift time, a little of the Saturday fit (9.6, not 8.7) and some evenness (its lightest week 25h 30m, not 27h 00m). Every closing shift is 30 to 60 minutes shorter than today’s.</a:t>
+              <a:t>This is the case in one slide. In Step (30 October 2026) is Closing Time’s weeks with the shift times chosen again, to put five on at every opening Monday to Saturday and to follow the weekday trains more closely; it is on the shortlist with Short Run, and this slide sets the two side by side. It meets every December staffing rule and all three flexible ones. Nine of its fifteen shift times are worked today, today’s 13:45 finish among them on every weekday. Nobody works more than five days in a row on the fixed rota, where today it is seven; a cover week placed badly can make it six, never more. Every working week is all earlies or all lates, and 18 of the 21 keep one shift time Monday to Friday, where today it is seven weeks in 16. Its seven full weekends off in 26 weeks are never more than five weeks apart, which is as close as the five cover weeks allow; today it is four in 20, up to seven weeks apart. Its working weeks run from 25h 30m to 41h 05m (today 25h 10m to 43h 50m), and the shortest rest is 14h 35m. Against Short Run it has the same run, weekends, weeks on one shift time, late finishes and leave; it adds today’s 13:45, an 8h 10m Saturday closer (Short Run’s is 8h 40m) and lighter, more even weeks (Short Run’s run from 24h 30m to 42h 30m), and its fit to the trains is the closer with the three days’ scores added together, though counted day by day across a week Short Run’s is a shade closer (26.7 against 26.8), as it is on weekdays alone. The honest costs: its two new weekday earlies are 8h 55m and 8h 45m, about 40 a year each, where today no early is over 8h 30m and Short Run has 20, at 9h 00m; finishes at 23:00 or later go from about 39 to 42 a year each, the smallest rise possible — the December staffing needs three to the close every day, and only those three finish after 23:00 — and finishes at 22:00 or later from about 78 to 94; and six shift times are new. Every closing shift is 30 to 60 minutes shorter than today’s.</a:t>
             </a:r>
             <a:endParaRPr lang="en-US" dirty="0"/>
           </a:p>
@@ -6353,7 +6353,7 @@
                 <a:ea typeface="Inter" pitchFamily="34" charset="-122"/>
                 <a:cs typeface="Inter" pitchFamily="34" charset="-120"/>
               </a:rPr>
-              <a:t>What it shares with the four shortlisted links, what it adds, and what it costs</a:t>
+              <a:t>What both shortlisted links give, what this one adds, and what it costs</a:t>
             </a:r>
             <a:endParaRPr lang="en-US" sz="1500" dirty="0"/>
           </a:p>
@@ -6456,7 +6456,7 @@
                 <a:ea typeface="Inter" pitchFamily="34" charset="-122"/>
                 <a:cs typeface="Inter" pitchFamily="34" charset="-120"/>
               </a:rPr>
-              <a:t>Like all four shortlisted: all 9 December rules and no avoidable fatigue warning</a:t>
+              <a:t>Both shortlisted: all 9 December rules and no avoidable fatigue warning</a:t>
             </a:r>
             <a:endParaRPr lang="en-US" sz="1500" dirty="0"/>
           </a:p>
@@ -6559,7 +6559,7 @@
                 <a:ea typeface="Inter" pitchFamily="34" charset="-122"/>
                 <a:cs typeface="Inter" pitchFamily="34" charset="-120"/>
               </a:rPr>
-              <a:t>Like all four shortlisted: about 14 full weekends off a year (today 10), at most 5 apart</a:t>
+              <a:t>Both shortlisted: about 14 full weekends off a year (today 10), at most 5 apart</a:t>
             </a:r>
             <a:endParaRPr lang="en-US" sz="1500" dirty="0"/>
           </a:p>
@@ -6662,7 +6662,7 @@
                 <a:ea typeface="Inter" pitchFamily="34" charset="-122"/>
                 <a:cs typeface="Inter" pitchFamily="34" charset="-120"/>
               </a:rPr>
-              <a:t>Like all four shortlisted: no shift over 9 hours, and every closing shift shorter</a:t>
+              <a:t>Both shortlisted: no shift over 9 hours, and every closing shift shorter</a:t>
             </a:r>
             <a:endParaRPr lang="en-US" sz="1500" dirty="0"/>
           </a:p>
@@ -6765,7 +6765,7 @@
                 <a:ea typeface="Inter" pitchFamily="34" charset="-122"/>
                 <a:cs typeface="Inter" pitchFamily="34" charset="-120"/>
               </a:rPr>
-              <a:t>This one adds: today’s 13:45, five at the Saturday open, no week over 41h 05m</a:t>
+              <a:t>This one adds: today’s 13:45, an 8h 10m Saturday closer, no week over 41h 05m</a:t>
             </a:r>
             <a:endParaRPr lang="en-US" sz="1500" dirty="0"/>
           </a:p>
@@ -6971,7 +6971,7 @@
                 <a:ea typeface="Inter" pitchFamily="34" charset="-122"/>
                 <a:cs typeface="Inter" pitchFamily="34" charset="-120"/>
               </a:rPr>
-              <a:t>Costs: weekday earlies to 8h 55m (today 8h 30m); four weeks off 15 days, not 14</a:t>
+              <a:t>Costs: 40 weekday earlies a year over 8h 30m; four weeks off 15 days, not 14</a:t>
             </a:r>
             <a:endParaRPr lang="en-US" sz="1500" dirty="0"/>
           </a:p>

--- a/docs/links-26/presentations/In-Step-for-managers.pptx
+++ b/docs/links-26/presentations/In-Step-for-managers.pptx
@@ -1018,7 +1018,7 @@
           <a:p>
             <a:r>
               <a:rPr lang="en-US" dirty="0"/>
-              <a:t>The nine rules are the December 2026 rules, as confirmed verbally on 29 September 2026: at least four at the open, three to the close, five after 22:00, 10 on a Sunday, the ticket office in fixed pairs, two on the floor at all times, handovers, 8–9 hour Sundays and no more shift times than today. Behind them sit three flexible rules that are aimed for when designing but not scored on: 14 on a Saturday, five cover weeks as evenly spaced as 26 weeks allow, and weekday closers starting at 15:45. In Step meets all three. It also stays under the ceiling of 219 contracted days a year agreed on 1 October 2026, at 218.6.</a:t>
+              <a:t>The nine rules are the December 2026 rules, as confirmed verbally on 29 September 2026: at least four at the open, three to the close, five after 22:00, 10 on a Sunday, the ticket office in fixed pairs, two on the floor at all times, handovers, 8–9 hour Sundays and no more shift times than today. Behind them sit three flexible rules that are aimed for when designing but not scored on: 14 on a Saturday, five cover weeks as evenly spaced as 26 weeks allow, and weekday closers starting at 15:45. In Step meets all three. It also stays under the ceiling of 219 contracted days a year set on 1 October 2026, at 218.6.</a:t>
             </a:r>
             <a:endParaRPr lang="en-US" dirty="0"/>
           </a:p>
@@ -1194,7 +1194,7 @@
           <a:p>
             <a:r>
               <a:rPr lang="en-US" dirty="0"/>
-              <a:t>The figure compares, hour by hour, the share of the day’s floor staff on duty with the share of the day’s train service, each train weighted by its length. 0 would be a perfect match. It is a guide to shape, not a staffing requirement — the rules on the previous slide are the requirement. Against today’s link, In Step’s score is a little over half on weekdays, about a seventh on a Saturday and about two-fifths on a Sunday; lower is closer. The score is a measure of the day’s shape only — not a staffing requirement or a passenger forecast.</a:t>
+              <a:t>The figure compares, hour by hour, the share of the day’s floor staff on duty with the share of the day’s train service, each train weighted by its length. 0 would be a perfect match. It is a guide to shape, not a staffing requirement or a passenger forecast — the rules on the previous slide are the requirement. Against today’s link, In Step’s score is a little over half on weekdays, about a seventh on a Saturday and about two-fifths on a Sunday; lower is closer.</a:t>
             </a:r>
             <a:endParaRPr lang="en-US" dirty="0"/>
           </a:p>
@@ -1282,7 +1282,7 @@
           <a:p>
             <a:r>
               <a:rPr lang="en-US" dirty="0"/>
-              <a:t>Working weeks average exactly 35 hours Monday to Saturday — 44,100 minutes across the 21 working weeks — so no overtime is needed to balance the Monday-to-Saturday week. Individual weeks range from 25h 30m to 41h 05m — today’s run from 25h 10m to 43h 50m, so both the heaviest and the lightest week sit inside today’s range; only the average is the contract, as today. Five cover weeks keep about the same share of the link as today’s four in 20 (one week in 5.2, against one in 5). Sunday is not contracted, so the ten Sunday duties are worked as rest-day overtime, exactly as today’s eight are. The two extra Sunday overtime duties a week come from the Sunday staffing of ten, confirmed verbally — any link that meets the rules needs them. The 26-week link, its five cover weeks and the ceiling of 219 contracted days a year were agreed on 1 October 2026; In Step gives 218.6.</a:t>
+              <a:t>Working weeks average exactly 35 hours Monday to Saturday — 44,100 minutes across the 21 working weeks — so no overtime is needed to balance the Monday-to-Saturday week. Individual weeks range from 25h 30m to 41h 05m — today’s run from 25h 10m to 43h 50m, so both the heaviest and the lightest week sit inside today’s range; only the average is the contract, as today. Five cover weeks keep about the same share of the link as today’s four in 20 (one week in 5.2, against one in 5). Sunday is not contracted, so the ten Sunday duties are worked as rest-day overtime, exactly as today’s eight are. The two extra Sunday overtime duties a week come from the Sunday staffing of ten, confirmed verbally — any link that meets the rules needs them. The 26-week link, its five cover weeks and the ceiling of 219 contracted days a year were set on 1 October 2026; In Step gives 218.6.</a:t>
             </a:r>
             <a:endParaRPr lang="en-US" dirty="0"/>
           </a:p>
@@ -1370,7 +1370,7 @@
           <a:p>
             <a:r>
               <a:rPr lang="en-US" dirty="0"/>
-              <a:t>The ORR factors are good practice, not pass/fail limits, and this is not a fatigue risk assessment. Two factors — early starts at a 06:20 station and a weekly rotation — come with every weekly link, so they are recorded on the proposal sheet for information and not counted. One definition, successive start times varying by more than two hours, is counted on our reading and should be confirmed by whoever assesses it. Early starts and a weekly rotation come with every link, so they are not counted. The written source of the 13-day limit is still to be confirmed.</a:t>
+              <a:t>The ORR factors are good practice, not pass/fail limits, and this is not a fatigue risk assessment. Two factors — early starts at a 06:20 station and a weekly rotation — come with every weekly link, so they are recorded on the proposal sheet for information and not counted. One definition, successive start times varying by more than two hours, is counted on our reading, in which a rest day breaks the run, and whoever assesses it should confirm that: on the stricter reading every link has it (FF19 on the rules sheet). The written source of the 13-day limit is still to be confirmed.</a:t>
             </a:r>
             <a:endParaRPr lang="en-US" dirty="0"/>
           </a:p>
@@ -1458,7 +1458,7 @@
           <a:p>
             <a:r>
               <a:rPr lang="en-US" dirty="0"/>
-              <a:t>This is the case in one slide. In Step (30 October 2026) is Closing Time’s weeks with the shift times chosen again, to put five on at every opening Monday to Saturday and to follow the weekday trains more closely; it is on the shortlist with Short Run, and this slide sets the two side by side. It meets every December staffing rule and all three flexible ones. Nine of its fifteen shift times are worked today, today’s 13:45 finish among them on every weekday. Nobody works more than five days in a row on the fixed rota, where today it is seven; a cover week placed badly can make it six, never more. Every working week is all earlies or all lates, and 18 of the 21 keep one shift time Monday to Friday, where today it is seven weeks in 16. Its seven full weekends off in 26 weeks are never more than five weeks apart, which is as close as the five cover weeks allow; today it is four in 20, up to seven weeks apart. Its working weeks run from 25h 30m to 41h 05m (today 25h 10m to 43h 50m), and the shortest rest is 14h 35m. Against Short Run it has the same run, weekends, weeks on one shift time, late finishes and leave; it adds today’s 13:45, an 8h 10m Saturday closer (Short Run’s is 8h 40m) and lighter, more even weeks (Short Run’s run from 24h 30m to 42h 30m), and its fit to the trains is the closer with the three days’ scores added together, though counted day by day across a week Short Run’s is a shade closer (26.7 against 26.8), as it is on weekdays alone. The honest costs: its two new weekday earlies are 8h 55m and 8h 45m, about 40 a year each, where today no early is over 8h 30m and Short Run has 20, at 9h 00m; finishes at 23:00 or later go from about 39 to 42 a year each, the smallest rise possible — the December staffing needs three to the close every day, and only those three finish after 23:00 — and finishes at 22:00 or later from about 78 to 94; and six shift times are new. Every closing shift is 30 to 60 minutes shorter than today’s.</a:t>
+              <a:t>This is the case in one slide. In Step (30 October 2026) is Closing Time’s weeks with the shift times chosen again, to put five on at every opening Monday to Saturday and to follow the weekday trains more closely; it is on the shortlist with Short Run, and this slide sets the two side by side. It meets every December staffing rule and all three flexible ones. Nine of its fifteen shift times are worked today, today’s 13:45 finish among them on every weekday. Nobody works more than five days in a row on the fixed rota, where today it is seven; a cover week placed badly can make it six, never more. Every working week is all earlies or all lates, and 18 of the 21 keep one shift time Monday to Friday; today seven weeks in 16 do both. Its seven full weekends off in 26 weeks are never more than five weeks apart, which is as close as the five cover weeks allow; today it is four in 20, up to seven weeks apart. Its working weeks run from 25h 30m to 41h 05m (today 25h 10m to 43h 50m), and the shortest rest is 14h 35m. Against Short Run it has the same run, weekends, weeks on one shift time, late finishes and leave; it adds today’s 13:45, an 8h 10m Saturday closer (Short Run’s is 8h 40m) and more even weeks (Short Run’s run from 24h 30m to 42h 30m), and its fit to the trains is the closer with the three days’ scores added together, though counted day by day across a week Short Run’s is a shade closer (26.7 against 26.8), as it is on weekdays alone. The honest costs: its two new weekday earlies, 8h 55m and 8h 45m, come round about 20 times a year each, 40 in all, where today no early is over 8h 30m and Short Run has 20, at 9h 00m; its Saturday closer is a new time on a Saturday, where Short Run has none; finishes at 23:00 or later go from about 39 to 42 a year each, the smallest rise possible — the December staffing needs three to the close every day, and only those three finish after 23:00 — and finishes at 22:00 or later from about 78 to 94; and six shift times are new. Every closing shift is 30 to 60 minutes shorter than today’s.</a:t>
             </a:r>
             <a:endParaRPr lang="en-US" dirty="0"/>
           </a:p>
@@ -1546,7 +1546,7 @@
           <a:p>
             <a:r>
               <a:rPr lang="en-US" dirty="0"/>
-              <a:t>Days at work stay at 219 a year (218.6 exactly; Monday to Saturday; Sunday is overtime), under the ceiling agreed on 1 October 2026. Late finishes average about three more a year each, all of them from the December staffing — three to the close every day, where today’s weekdays have two — so no link meeting the same rules on 26 weeks could have fewer. Full weekends off are seven in 26 and never more than five weeks apart; nobody works more than five days in a row on the fixed rota; no week mixes earlies and lates, and 18 of the 21 working weeks keep one shift time. Weekly hours run from 25h 30m to 41h 05m (today 25h 10m to 43h 50m); only the average is the contract. Two new weekday earlies, 06:20–15:15 and 07:00–15:45, are 8h 55m and 8h 45m, about 40 a year each, where today no early is over 8h 30m. The average shift is about two minutes longer.</a:t>
+              <a:t>Days at work stay at 219 a year (218.6 exactly; Monday to Saturday; Sunday is overtime), under the ceiling set on 1 October 2026. Late finishes average about three more a year each, all of them from the December staffing — three to the close every day, where today has two Monday to Saturday — so no link meeting the same rules on 26 weeks could have fewer. Full weekends off are seven in 26 and never more than five weeks apart; nobody works more than five days in a row on the fixed rota; no week mixes earlies and lates, and 18 of the 21 working weeks keep one shift time. Weekly hours run from 25h 30m to 41h 05m (today 25h 10m to 43h 50m); only the average is the contract. Two new weekday earlies, 06:20–15:15 and 07:00–15:45, are 8h 55m and 8h 45m, each about 20 a year — 40 in all — where today no early is over 8h 30m. The average shift is about two minutes longer.</a:t>
             </a:r>
             <a:endParaRPr lang="en-US" dirty="0"/>
           </a:p>
@@ -6889,11 +6889,11 @@
             <a:avLst/>
           </a:prstGeom>
           <a:solidFill>
-            <a:srgbClr val="1E7B4B"/>
+            <a:srgbClr val="A15C00"/>
           </a:solidFill>
           <a:ln w="12700">
             <a:solidFill>
-              <a:srgbClr val="1E7B4B"/>
+              <a:srgbClr val="A15C00"/>
             </a:solidFill>
             <a:prstDash val="solid"/>
           </a:ln>

--- a/docs/links-26/presentations/In-Step-for-managers.pptx
+++ b/docs/links-26/presentations/In-Step-for-managers.pptx
@@ -1370,7 +1370,7 @@
           <a:p>
             <a:r>
               <a:rPr lang="en-US" dirty="0"/>
-              <a:t>The ORR factors are good practice, not pass/fail limits, and this is not a fatigue risk assessment. Two factors — early starts at a 06:20 station and a weekly rotation — come with every weekly link, so they are recorded on the proposal sheet for information and not counted. One definition, successive start times varying by more than two hours, is counted on our reading, in which a rest day breaks the run, and whoever assesses it should confirm that: on the stricter reading every link has it (FF19 on the rules sheet). The written source of the 13-day limit is still to be confirmed.</a:t>
+              <a:t>The ORR factors are good practice, not pass/fail limits, and this is not a fatigue risk assessment. Two factors — early starts at a 06:20 station and a weekly rotation — come with every weekly link, so they are recorded on the proposal sheet for information and not counted. One definition, successive start times varying by more than two hours, is counted on our reading, in which a rest day breaks the run, and whoever assesses it should confirm that: on the stricter reading every link has it (FF19 on the rules sheet). The “up to 1” beside the fatigue warnings is the rail industry’s 55-hour guideline: worked as four 8-hour duties straight after a busy line, with its Sunday as overtime too, a cover week can make 56.3 hours in seven days. Where the four fall, and whether the Sunday is worked, is for the roster office. The written source of the 13-day limit is still to be confirmed.</a:t>
             </a:r>
             <a:endParaRPr lang="en-US" dirty="0"/>
           </a:p>
@@ -1458,7 +1458,7 @@
           <a:p>
             <a:r>
               <a:rPr lang="en-US" dirty="0"/>
-              <a:t>This is the case in one slide. In Step (30 October 2026) is Closing Time’s weeks with the shift times chosen again, to put five on at every opening Monday to Saturday and to follow the weekday trains more closely; it is on the shortlist with Short Run, and this slide sets the two side by side. It meets every December staffing rule and all three flexible ones. Nine of its fifteen shift times are worked today, today’s 13:45 finish among them on every weekday. Nobody works more than five days in a row on the fixed rota, where today it is seven; a cover week placed badly can make it six, never more. Every working week is all earlies or all lates, and 18 of the 21 keep one shift time Monday to Friday; today seven weeks in 16 do both. Its seven full weekends off in 26 weeks are never more than five weeks apart, which is as close as the five cover weeks allow; today it is four in 20, up to seven weeks apart. Its working weeks run from 25h 30m to 41h 05m (today 25h 10m to 43h 50m), and the shortest rest is 14h 35m. Against Short Run it has the same run, weekends, weeks on one shift time, late finishes and leave; it adds today’s 13:45, an 8h 10m Saturday closer (Short Run’s is 8h 40m) and more even weeks (Short Run’s run from 24h 30m to 42h 30m), and its fit to the trains is the closer with the three days’ scores added together, though counted day by day across a week Short Run’s is a shade closer (26.7 against 26.8), as it is on weekdays alone. The honest costs: its two new weekday earlies, 8h 55m and 8h 45m, come round about 20 times a year each, 40 in all, where today no early is over 8h 30m and Short Run has 20, at 9h 00m; its Saturday closer is a new time on a Saturday, where Short Run has none; finishes at 23:00 or later go from about 39 to 42 a year each, the smallest rise possible — the December staffing needs three to the close every day, and only those three finish after 23:00 — and finishes at 22:00 or later from about 78 to 94; and six shift times are new. Every closing shift is 30 to 60 minutes shorter than today’s.</a:t>
+              <a:t>This is the case in one slide. In Step (30 October 2026) is Closing Time’s weeks with the shift times chosen again, to put five on at every opening Monday to Saturday and to follow the weekday trains more closely; it is on the shortlist with Short Run, and this slide sets the two side by side. It meets every December staffing rule and all three flexible ones. Nine of its fifteen shift times are worked today, today’s 13:45 finish among them on every weekday. Nobody works more than five days in a row on the fixed rota, where today it is seven; a cover week placed badly, with its Sunday worked as overtime, can make it seven, never more. Every working week is all earlies or all lates, and 18 of the 21 keep one shift time Monday to Friday; today seven weeks in 16 do both. Its seven full weekends off in 26 weeks are never more than five weeks apart, which is as close as the five cover weeks allow; today it is four in 20, up to seven weeks apart. Its working weeks run from 25h 30m to 41h 05m (today 25h 10m to 43h 50m), and the shortest rest is 14h 35m. Against Short Run it has the same run, weekends, weeks on one shift time, late finishes and leave; it adds today’s 13:45, an 8h 10m Saturday closer (Short Run’s is 8h 40m) and more even weeks (Short Run’s run from 24h 30m to 42h 30m), and its fit to the trains is the closer with the three days’ scores added together, though counted day by day across a week Short Run’s is a shade closer (26.7 against 26.8), as it is on weekdays alone. The honest costs: its two new weekday earlies, 8h 55m and 8h 45m, come round about 20 times a year each, 40 in all, where today no early is over 8h 30m and Short Run has 20, at 9h 00m; its Saturday closer is a new time on a Saturday, where Short Run has none; finishes at 23:00 or later go from about 39 to 42 a year each, the smallest rise possible — the December staffing needs three to the close every day, and only those three finish after 23:00 — and finishes at 22:00 or later from about 78 to 94; and six shift times are new. Every closing shift is 30 to 60 minutes shorter than today’s.</a:t>
             </a:r>
             <a:endParaRPr lang="en-US" dirty="0"/>
           </a:p>
@@ -5706,7 +5706,7 @@
                 <a:ea typeface="Inter" pitchFamily="34" charset="-122"/>
                 <a:cs typeface="Inter" pitchFamily="34" charset="-120"/>
               </a:rPr>
-              <a:t>0</a:t>
+              <a:t>0 (up to 1)</a:t>
             </a:r>
             <a:endParaRPr lang="en-US" sz="1800" dirty="0"/>
           </a:p>
@@ -5850,7 +5850,7 @@
                 <a:ea typeface="Inter" pitchFamily="34" charset="-122"/>
                 <a:cs typeface="Inter" pitchFamily="34" charset="-120"/>
               </a:rPr>
-              <a:t>5 (up to 6)</a:t>
+              <a:t>5 (up to 7)</a:t>
             </a:r>
             <a:endParaRPr lang="en-US" sz="1800" dirty="0"/>
           </a:p>
@@ -6456,7 +6456,7 @@
                 <a:ea typeface="Inter" pitchFamily="34" charset="-122"/>
                 <a:cs typeface="Inter" pitchFamily="34" charset="-120"/>
               </a:rPr>
-              <a:t>Both shortlisted: all 9 December rules and no avoidable fatigue warning</a:t>
+              <a:t>Both shortlisted: all 9 December rules; no avoidable fatigue warning, fixed rota</a:t>
             </a:r>
             <a:endParaRPr lang="en-US" sz="1500" dirty="0"/>
           </a:p>

--- a/docs/links-26/presentations/In-Step-for-managers.pptx
+++ b/docs/links-26/presentations/In-Step-for-managers.pptx
@@ -1018,7 +1018,7 @@
           <a:p>
             <a:r>
               <a:rPr lang="en-US" dirty="0"/>
-              <a:t>The nine rules are the December 2026 rules, as confirmed verbally on 29 September 2026: at least four at the open, three to the close, five after 22:00, 10 on a Sunday, the ticket office in fixed pairs, two on the floor at all times, handovers, 8–9 hour Sundays and no more shift times than today. Behind them sit three flexible rules that are aimed for when designing but not scored on: 14 on a Saturday, five cover weeks as evenly spaced as 26 weeks allow, and weekday closers starting at 15:45. In Step meets all three. It also stays under the ceiling of 219 contracted days a year set on 1 October 2026, at 218.6.</a:t>
+              <a:t>The nine rules are the December 2026 rules, as confirmed verbally on 29 September 2026: at least four at the open, three to the close, five after 22:00, 10 on a Sunday, the ticket office in fixed pairs, two on the floor at all times, handovers, 8–9 hour Sundays and no more shift times than today. Behind them sit three flexible rules that are aimed for when designing but not scored on: 14 on a Saturday, five cover weeks as evenly spaced as 26 weeks allow, and weekday closers starting at 15:45 or later. In Step meets all three. It also stays under the ceiling of 219 contracted days a year set on 1 October 2026, at 218.6.</a:t>
             </a:r>
             <a:endParaRPr lang="en-US" dirty="0"/>
           </a:p>
@@ -1106,7 +1106,7 @@
           <a:p>
             <a:r>
               <a:rPr lang="en-US" dirty="0"/>
-              <a:t>Today’s link meets 4 of the 9 December rules; In Step meets all 9, and the three flexible ones as well (14 on a Saturday, evenly spaced cover weeks, 15:45 weekday closers). Someone finishing at exactly 22:00 is not counted as still on after 22:00. The floor figure leaves out the ticket office, except its second person at the quiet ends of the day. Three to the close every day is the minimum, and In Step rosters exactly that, which is what keeps its late finishes down.</a:t>
+              <a:t>Today’s link meets 4 of the 9 December rules; In Step meets all 9, and the three flexible ones as well (14 on a Saturday, evenly spaced cover weeks, weekday closers from 15:45). Someone finishing at exactly 22:00 is not counted as still on after 22:00. The floor figure leaves out the ticket office, except its second person at the quiet ends of the day. Three to the close every day is the minimum, and In Step rosters exactly that, which is what keeps its late finishes down.</a:t>
             </a:r>
             <a:endParaRPr lang="en-US" dirty="0"/>
           </a:p>
@@ -1458,7 +1458,7 @@
           <a:p>
             <a:r>
               <a:rPr lang="en-US" dirty="0"/>
-              <a:t>This is the case in one slide. In Step (30 October 2026) is Closing Time’s weeks with the shift times chosen again, to put five on at every opening Monday to Saturday and to follow the weekday trains more closely; it is on the shortlist with Short Run, and this slide sets the two side by side. It meets every December staffing rule and all three flexible ones. Nine of its fifteen shift times are worked today, today’s 13:45 finish among them on every weekday. Nobody works more than five days in a row on the fixed rota, where today it is seven; a cover week placed badly, with its Sunday worked as overtime, can make it seven, never more. Every working week is all earlies or all lates, and 18 of the 21 keep one shift time Monday to Friday; today seven weeks in 16 do both. Its seven full weekends off in 26 weeks are never more than five weeks apart, which is as close as the five cover weeks allow; today it is four in 20, up to seven weeks apart. Its working weeks run from 25h 30m to 41h 05m (today 25h 10m to 43h 50m), and the shortest rest is 14h 35m. Against Short Run it has the same run, weekends, weeks on one shift time, late finishes and leave; it adds today’s 13:45, an 8h 10m Saturday closer (Short Run’s is 8h 40m) and more even weeks (Short Run’s run from 24h 30m to 42h 30m), and its fit to the trains is the closer with the three days’ scores added together, though counted day by day across a week Short Run’s is a shade closer (26.7 against 26.8), as it is on weekdays alone. The honest costs: its two new weekday earlies, 8h 55m and 8h 45m, come round about 20 times a year each, 40 in all, where today no early is over 8h 30m and Short Run has 20, at 9h 00m; its Saturday closer is a new time on a Saturday, where Short Run has none; finishes at 23:00 or later go from about 39 to 42 a year each, the smallest rise possible — the December staffing needs three to the close every day, and only those three finish after 23:00 — and finishes at 22:00 or later from about 78 to 94; and six shift times are new. Every closing shift is 30 to 60 minutes shorter than today’s.</a:t>
+              <a:t>This is the case in one slide. In Step (30 October 2026) is Closing Time’s weeks with the shift times chosen again, to put five on at every opening Monday to Saturday and to follow the weekday trains more closely. It is on the shortlist with Even Step, the recommended design, and Short Run, and this slide sets it beside both. It meets every December staffing rule and all three flexible ones. Nine of its fifteen shift times are worked today, today’s 13:45 finish among them on every weekday. Nobody works more than five days in a row on the fixed rota, where today it is seven; a cover week placed badly, with its Sunday worked as overtime, can make it seven, never more. Every working week is all earlies or all lates, and 18 of the 21 keep one shift time Monday to Friday; today seven weeks in 16 do both. Its seven full weekends off in 26 weeks are never more than five weeks apart, which is as close as the five cover weeks allow; today it is four in 20, up to seven weeks apart. Its working weeks run from 25h 30m to 41h 05m (today 25h 10m to 43h 50m), the most even of the three, and the shortest rest is 14h 35m. Even Step is these same weeks with no shift over 8h 30m Monday to Saturday; against it In Step’s weekday lates are shorter (8h 12m on average, closers aside, against 8h 27m), its working day moves less from one week to the next (1h 13m on average, against 1h 31m) and its weekday fit to the trains is closer (29.8 against 32.6), and the price is its two new weekday earlies, 8h 55m and 8h 45m, which come round about 20 times a year each, 40 in all, where Even Step has none over 8h 30m and neither has today. Against Short Run it has the same run, weekends, weeks on one shift time, late finishes and leave; it adds today’s 13:45, an 8h 10m Saturday closer (Short Run’s is 8h 40m) and more even weeks (Short Run’s run from 24h 30m to 42h 30m), and its fit to the trains is the closer with the three days’ scores added together, though counted day by day across a week Short Run’s is a shade closer (26.7 against 26.8), as it is on weekdays alone; Short Run has 20 weekday earlies a year over 8h 30m, at 9h 00m. The other honest costs: its Saturday closer is a new time on a Saturday, where Short Run has none; finishes at 23:00 or later go from about 39 to 42 a year each, the smallest rise possible — the December staffing needs three to the close every day, and only those three finish after 23:00 — and finishes at 22:00 or later from about 78 to 94; and six shift times are new. Every closing shift is 30 to 60 minutes shorter than today’s.</a:t>
             </a:r>
             <a:endParaRPr lang="en-US" dirty="0"/>
           </a:p>
@@ -6353,7 +6353,7 @@
                 <a:ea typeface="Inter" pitchFamily="34" charset="-122"/>
                 <a:cs typeface="Inter" pitchFamily="34" charset="-120"/>
               </a:rPr>
-              <a:t>What both shortlisted links give, what this one adds, and what it costs</a:t>
+              <a:t>What all three shortlisted links give, what this one adds, and what it costs</a:t>
             </a:r>
             <a:endParaRPr lang="en-US" sz="1500" dirty="0"/>
           </a:p>
@@ -6456,7 +6456,7 @@
                 <a:ea typeface="Inter" pitchFamily="34" charset="-122"/>
                 <a:cs typeface="Inter" pitchFamily="34" charset="-120"/>
               </a:rPr>
-              <a:t>Both shortlisted: all 9 December rules; no avoidable fatigue warning, fixed rota</a:t>
+              <a:t>All three shortlisted: all 9 December rules; no avoidable fatigue warning, fixed rota</a:t>
             </a:r>
             <a:endParaRPr lang="en-US" sz="1500" dirty="0"/>
           </a:p>
@@ -6559,7 +6559,7 @@
                 <a:ea typeface="Inter" pitchFamily="34" charset="-122"/>
                 <a:cs typeface="Inter" pitchFamily="34" charset="-120"/>
               </a:rPr>
-              <a:t>Both shortlisted: about 14 full weekends off a year (today 10), at most 5 apart</a:t>
+              <a:t>All three shortlisted: about 14 full weekends off a year (today 10), at most 5 apart</a:t>
             </a:r>
             <a:endParaRPr lang="en-US" sz="1500" dirty="0"/>
           </a:p>
@@ -6662,7 +6662,7 @@
                 <a:ea typeface="Inter" pitchFamily="34" charset="-122"/>
                 <a:cs typeface="Inter" pitchFamily="34" charset="-120"/>
               </a:rPr>
-              <a:t>Both shortlisted: no shift over 9 hours, and every closing shift shorter</a:t>
+              <a:t>All three shortlisted: no shift over 9 hours, and every closing shift shorter</a:t>
             </a:r>
             <a:endParaRPr lang="en-US" sz="1500" dirty="0"/>
           </a:p>
@@ -6765,7 +6765,7 @@
                 <a:ea typeface="Inter" pitchFamily="34" charset="-122"/>
                 <a:cs typeface="Inter" pitchFamily="34" charset="-120"/>
               </a:rPr>
-              <a:t>This one adds: today’s 13:45, an 8h 10m Saturday closer, no week over 41h 05m</a:t>
+              <a:t>This one adds: no week over 41h 05m, and the closest Saturday fit</a:t>
             </a:r>
             <a:endParaRPr lang="en-US" sz="1500" dirty="0"/>
           </a:p>

--- a/docs/links-26/presentations/In-Step-for-managers.pptx
+++ b/docs/links-26/presentations/In-Step-for-managers.pptx
@@ -2682,7 +2682,7 @@
                 <a:ea typeface="Inter" pitchFamily="34" charset="-122"/>
                 <a:cs typeface="Inter" pitchFamily="34" charset="-120"/>
               </a:rPr>
-              <a:t>today’s link: 4</a:t>
+              <a:t>today 4</a:t>
             </a:r>
             <a:endParaRPr lang="en-US" sz="1300" dirty="0"/>
           </a:p>
@@ -3156,7 +3156,7 @@
                 <a:ea typeface="Inter" pitchFamily="34" charset="-122"/>
                 <a:cs typeface="Inter" pitchFamily="34" charset="-120"/>
               </a:rPr>
-              <a:t>today: 20</a:t>
+              <a:t>today 20</a:t>
             </a:r>
             <a:endParaRPr lang="en-US" sz="1300" dirty="0"/>
           </a:p>
@@ -4708,11 +4708,11 @@
         <p:spPr>
           <a:xfrm>
             <a:off x="457200" y="1801368"/>
-            <a:ext cx="8229600" cy="365760"/>
+            <a:ext cx="8229600" cy="461176"/>
           </a:xfrm>
           <a:prstGeom prst="roundRect">
             <a:avLst>
-              <a:gd name="adj" fmla="val 11538"/>
+              <a:gd name="adj" fmla="val 9151"/>
             </a:avLst>
           </a:prstGeom>
           <a:solidFill>
@@ -4735,7 +4735,7 @@
         <p:spPr>
           <a:xfrm>
             <a:off x="640080" y="1801368"/>
-            <a:ext cx="4023360" cy="365760"/>
+            <a:ext cx="4023360" cy="461176"/>
           </a:xfrm>
           <a:prstGeom prst="rect">
             <a:avLst/>
@@ -4774,7 +4774,7 @@
         <p:spPr>
           <a:xfrm>
             <a:off x="4663440" y="1801368"/>
-            <a:ext cx="2011680" cy="365760"/>
+            <a:ext cx="2011680" cy="461176"/>
           </a:xfrm>
           <a:prstGeom prst="rect">
             <a:avLst/>
@@ -4813,7 +4813,7 @@
         <p:spPr>
           <a:xfrm>
             <a:off x="6675120" y="1801368"/>
-            <a:ext cx="2011680" cy="365760"/>
+            <a:ext cx="2011680" cy="461176"/>
           </a:xfrm>
           <a:prstGeom prst="rect">
             <a:avLst/>
@@ -4851,12 +4851,12 @@
         </p:nvSpPr>
         <p:spPr>
           <a:xfrm>
-            <a:off x="457200" y="2240280"/>
-            <a:ext cx="8229600" cy="365760"/>
+            <a:off x="457200" y="2354779"/>
+            <a:ext cx="8229600" cy="461176"/>
           </a:xfrm>
           <a:prstGeom prst="roundRect">
             <a:avLst>
-              <a:gd name="adj" fmla="val 11538"/>
+              <a:gd name="adj" fmla="val 9151"/>
             </a:avLst>
           </a:prstGeom>
           <a:solidFill>
@@ -4878,8 +4878,8 @@
         </p:nvSpPr>
         <p:spPr>
           <a:xfrm>
-            <a:off x="640080" y="2240280"/>
-            <a:ext cx="4023360" cy="365760"/>
+            <a:off x="640080" y="2354779"/>
+            <a:ext cx="4023360" cy="461176"/>
           </a:xfrm>
           <a:prstGeom prst="rect">
             <a:avLst/>
@@ -4917,8 +4917,8 @@
         </p:nvSpPr>
         <p:spPr>
           <a:xfrm>
-            <a:off x="4663440" y="2240280"/>
-            <a:ext cx="2011680" cy="365760"/>
+            <a:off x="4663440" y="2354779"/>
+            <a:ext cx="2011680" cy="461176"/>
           </a:xfrm>
           <a:prstGeom prst="rect">
             <a:avLst/>
@@ -4956,8 +4956,8 @@
         </p:nvSpPr>
         <p:spPr>
           <a:xfrm>
-            <a:off x="6675120" y="2240280"/>
-            <a:ext cx="2011680" cy="365760"/>
+            <a:off x="6675120" y="2354779"/>
+            <a:ext cx="2011680" cy="461176"/>
           </a:xfrm>
           <a:prstGeom prst="rect">
             <a:avLst/>
@@ -4995,12 +4995,12 @@
         </p:nvSpPr>
         <p:spPr>
           <a:xfrm>
-            <a:off x="457200" y="2679192"/>
-            <a:ext cx="8229600" cy="365760"/>
+            <a:off x="457200" y="2908190"/>
+            <a:ext cx="8229600" cy="461176"/>
           </a:xfrm>
           <a:prstGeom prst="roundRect">
             <a:avLst>
-              <a:gd name="adj" fmla="val 11538"/>
+              <a:gd name="adj" fmla="val 9151"/>
             </a:avLst>
           </a:prstGeom>
           <a:solidFill>
@@ -5022,8 +5022,8 @@
         </p:nvSpPr>
         <p:spPr>
           <a:xfrm>
-            <a:off x="640080" y="2679192"/>
-            <a:ext cx="4023360" cy="365760"/>
+            <a:off x="640080" y="2908190"/>
+            <a:ext cx="4023360" cy="461176"/>
           </a:xfrm>
           <a:prstGeom prst="rect">
             <a:avLst/>
@@ -5061,8 +5061,8 @@
         </p:nvSpPr>
         <p:spPr>
           <a:xfrm>
-            <a:off x="4663440" y="2679192"/>
-            <a:ext cx="2011680" cy="365760"/>
+            <a:off x="4663440" y="2908190"/>
+            <a:ext cx="2011680" cy="461176"/>
           </a:xfrm>
           <a:prstGeom prst="rect">
             <a:avLst/>
@@ -5100,8 +5100,8 @@
         </p:nvSpPr>
         <p:spPr>
           <a:xfrm>
-            <a:off x="6675120" y="2679192"/>
-            <a:ext cx="2011680" cy="365760"/>
+            <a:off x="6675120" y="2908190"/>
+            <a:ext cx="2011680" cy="461176"/>
           </a:xfrm>
           <a:prstGeom prst="rect">
             <a:avLst/>
@@ -5139,12 +5139,12 @@
         </p:nvSpPr>
         <p:spPr>
           <a:xfrm>
-            <a:off x="457200" y="3118104"/>
-            <a:ext cx="8229600" cy="365760"/>
+            <a:off x="457200" y="3461601"/>
+            <a:ext cx="8229600" cy="461176"/>
           </a:xfrm>
           <a:prstGeom prst="roundRect">
             <a:avLst>
-              <a:gd name="adj" fmla="val 11538"/>
+              <a:gd name="adj" fmla="val 9151"/>
             </a:avLst>
           </a:prstGeom>
           <a:solidFill>
@@ -5166,8 +5166,8 @@
         </p:nvSpPr>
         <p:spPr>
           <a:xfrm>
-            <a:off x="640080" y="3118104"/>
-            <a:ext cx="4023360" cy="365760"/>
+            <a:off x="640080" y="3461601"/>
+            <a:ext cx="4023360" cy="461176"/>
           </a:xfrm>
           <a:prstGeom prst="rect">
             <a:avLst/>
@@ -5205,8 +5205,8 @@
         </p:nvSpPr>
         <p:spPr>
           <a:xfrm>
-            <a:off x="4663440" y="3118104"/>
-            <a:ext cx="2011680" cy="365760"/>
+            <a:off x="4663440" y="3461601"/>
+            <a:ext cx="2011680" cy="461176"/>
           </a:xfrm>
           <a:prstGeom prst="rect">
             <a:avLst/>
@@ -5244,8 +5244,8 @@
         </p:nvSpPr>
         <p:spPr>
           <a:xfrm>
-            <a:off x="6675120" y="3118104"/>
-            <a:ext cx="2011680" cy="365760"/>
+            <a:off x="6675120" y="3461601"/>
+            <a:ext cx="2011680" cy="461176"/>
           </a:xfrm>
           <a:prstGeom prst="rect">
             <a:avLst/>
@@ -5577,11 +5577,11 @@
         <p:spPr>
           <a:xfrm>
             <a:off x="457200" y="1801368"/>
-            <a:ext cx="8229600" cy="365760"/>
+            <a:ext cx="8229600" cy="461176"/>
           </a:xfrm>
           <a:prstGeom prst="roundRect">
             <a:avLst>
-              <a:gd name="adj" fmla="val 11538"/>
+              <a:gd name="adj" fmla="val 9151"/>
             </a:avLst>
           </a:prstGeom>
           <a:solidFill>
@@ -5604,7 +5604,7 @@
         <p:spPr>
           <a:xfrm>
             <a:off x="640080" y="1801368"/>
-            <a:ext cx="4023360" cy="365760"/>
+            <a:ext cx="4023360" cy="461176"/>
           </a:xfrm>
           <a:prstGeom prst="rect">
             <a:avLst/>
@@ -5643,7 +5643,7 @@
         <p:spPr>
           <a:xfrm>
             <a:off x="4663440" y="1801368"/>
-            <a:ext cx="2011680" cy="365760"/>
+            <a:ext cx="2011680" cy="461176"/>
           </a:xfrm>
           <a:prstGeom prst="rect">
             <a:avLst/>
@@ -5682,7 +5682,7 @@
         <p:spPr>
           <a:xfrm>
             <a:off x="6675120" y="1801368"/>
-            <a:ext cx="2011680" cy="365760"/>
+            <a:ext cx="2011680" cy="461176"/>
           </a:xfrm>
           <a:prstGeom prst="rect">
             <a:avLst/>
@@ -5720,12 +5720,12 @@
         </p:nvSpPr>
         <p:spPr>
           <a:xfrm>
-            <a:off x="457200" y="2240280"/>
-            <a:ext cx="8229600" cy="365760"/>
+            <a:off x="457200" y="2354779"/>
+            <a:ext cx="8229600" cy="461176"/>
           </a:xfrm>
           <a:prstGeom prst="roundRect">
             <a:avLst>
-              <a:gd name="adj" fmla="val 11538"/>
+              <a:gd name="adj" fmla="val 9151"/>
             </a:avLst>
           </a:prstGeom>
           <a:solidFill>
@@ -5747,8 +5747,8 @@
         </p:nvSpPr>
         <p:spPr>
           <a:xfrm>
-            <a:off x="640080" y="2240280"/>
-            <a:ext cx="4023360" cy="365760"/>
+            <a:off x="640080" y="2354779"/>
+            <a:ext cx="4023360" cy="461176"/>
           </a:xfrm>
           <a:prstGeom prst="rect">
             <a:avLst/>
@@ -5786,8 +5786,8 @@
         </p:nvSpPr>
         <p:spPr>
           <a:xfrm>
-            <a:off x="4663440" y="2240280"/>
-            <a:ext cx="2011680" cy="365760"/>
+            <a:off x="4663440" y="2354779"/>
+            <a:ext cx="2011680" cy="461176"/>
           </a:xfrm>
           <a:prstGeom prst="rect">
             <a:avLst/>
@@ -5825,8 +5825,8 @@
         </p:nvSpPr>
         <p:spPr>
           <a:xfrm>
-            <a:off x="6675120" y="2240280"/>
-            <a:ext cx="2011680" cy="365760"/>
+            <a:off x="6675120" y="2354779"/>
+            <a:ext cx="2011680" cy="461176"/>
           </a:xfrm>
           <a:prstGeom prst="rect">
             <a:avLst/>
@@ -5864,12 +5864,12 @@
         </p:nvSpPr>
         <p:spPr>
           <a:xfrm>
-            <a:off x="457200" y="2679192"/>
-            <a:ext cx="8229600" cy="365760"/>
+            <a:off x="457200" y="2908190"/>
+            <a:ext cx="8229600" cy="461176"/>
           </a:xfrm>
           <a:prstGeom prst="roundRect">
             <a:avLst>
-              <a:gd name="adj" fmla="val 11538"/>
+              <a:gd name="adj" fmla="val 9151"/>
             </a:avLst>
           </a:prstGeom>
           <a:solidFill>
@@ -5891,8 +5891,8 @@
         </p:nvSpPr>
         <p:spPr>
           <a:xfrm>
-            <a:off x="640080" y="2679192"/>
-            <a:ext cx="4023360" cy="365760"/>
+            <a:off x="640080" y="2908190"/>
+            <a:ext cx="4023360" cy="461176"/>
           </a:xfrm>
           <a:prstGeom prst="rect">
             <a:avLst/>
@@ -5930,8 +5930,8 @@
         </p:nvSpPr>
         <p:spPr>
           <a:xfrm>
-            <a:off x="4663440" y="2679192"/>
-            <a:ext cx="2011680" cy="365760"/>
+            <a:off x="4663440" y="2908190"/>
+            <a:ext cx="2011680" cy="461176"/>
           </a:xfrm>
           <a:prstGeom prst="rect">
             <a:avLst/>
@@ -5969,8 +5969,8 @@
         </p:nvSpPr>
         <p:spPr>
           <a:xfrm>
-            <a:off x="6675120" y="2679192"/>
-            <a:ext cx="2011680" cy="365760"/>
+            <a:off x="6675120" y="2908190"/>
+            <a:ext cx="2011680" cy="461176"/>
           </a:xfrm>
           <a:prstGeom prst="rect">
             <a:avLst/>
@@ -6008,12 +6008,12 @@
         </p:nvSpPr>
         <p:spPr>
           <a:xfrm>
-            <a:off x="457200" y="3118104"/>
-            <a:ext cx="8229600" cy="365760"/>
+            <a:off x="457200" y="3461601"/>
+            <a:ext cx="8229600" cy="461176"/>
           </a:xfrm>
           <a:prstGeom prst="roundRect">
             <a:avLst>
-              <a:gd name="adj" fmla="val 11538"/>
+              <a:gd name="adj" fmla="val 9151"/>
             </a:avLst>
           </a:prstGeom>
           <a:solidFill>
@@ -6035,8 +6035,8 @@
         </p:nvSpPr>
         <p:spPr>
           <a:xfrm>
-            <a:off x="640080" y="3118104"/>
-            <a:ext cx="4023360" cy="365760"/>
+            <a:off x="640080" y="3461601"/>
+            <a:ext cx="4023360" cy="461176"/>
           </a:xfrm>
           <a:prstGeom prst="rect">
             <a:avLst/>
@@ -6074,8 +6074,8 @@
         </p:nvSpPr>
         <p:spPr>
           <a:xfrm>
-            <a:off x="4663440" y="3118104"/>
-            <a:ext cx="2011680" cy="365760"/>
+            <a:off x="4663440" y="3461601"/>
+            <a:ext cx="2011680" cy="461176"/>
           </a:xfrm>
           <a:prstGeom prst="rect">
             <a:avLst/>
@@ -6113,8 +6113,8 @@
         </p:nvSpPr>
         <p:spPr>
           <a:xfrm>
-            <a:off x="6675120" y="3118104"/>
-            <a:ext cx="2011680" cy="365760"/>
+            <a:off x="6675120" y="3461601"/>
+            <a:ext cx="2011680" cy="461176"/>
           </a:xfrm>
           <a:prstGeom prst="rect">
             <a:avLst/>
@@ -6868,7 +6868,7 @@
                 <a:ea typeface="Inter" pitchFamily="34" charset="-122"/>
                 <a:cs typeface="Inter" pitchFamily="34" charset="-120"/>
               </a:rPr>
-              <a:t>9 of 15 shift times worked today; 6 new, three shorter versions of today’s lates</a:t>
+              <a:t>9 of 15 shift times worked today; 6 new, 3 of them shorter versions of today’s lates</a:t>
             </a:r>
             <a:endParaRPr lang="en-US" sz="1500" dirty="0"/>
           </a:p>

--- a/docs/links-26/presentations/In-Step-for-managers.pptx
+++ b/docs/links-26/presentations/In-Step-for-managers.pptx
@@ -1106,7 +1106,7 @@
           <a:p>
             <a:r>
               <a:rPr lang="en-US" dirty="0"/>
-              <a:t>Today’s link meets 4 of the 9 December rules; In Step meets all 9, and the three flexible ones as well (14 on a Saturday, evenly spaced cover weeks, weekday closers from 15:45). Someone finishing at exactly 22:00 is not counted as still on after 22:00. The floor figure leaves out the ticket office, except its second person at the quiet ends of the day. Three to the close every day is the minimum, and In Step rosters exactly that, which is what keeps its late finishes down.</a:t>
+              <a:t>Today’s link meets 4 of the 9 December rules; In Step meets all 9, and the three flexible ones as well (14 on a Saturday, evenly spaced cover weeks, weekday closers from 15:45). Someone finishing at exactly 22:00 is not counted as still on after 22:00. The floor figure leaves out the ticket office, except at the quiet ends of the day, when one of each pair helps on the floor (on a Sunday both lates, until 15:00). Three to the close every day is the minimum, and In Step rosters exactly that, which is what keeps its late finishes down.</a:t>
             </a:r>
             <a:endParaRPr lang="en-US" dirty="0"/>
           </a:p>
@@ -3515,7 +3515,7 @@
                 <a:ea typeface="Inter" pitchFamily="34" charset="-122"/>
                 <a:cs typeface="Inter" pitchFamily="34" charset="-120"/>
               </a:rPr>
-              <a:t>On duty during the day</a:t>
+              <a:t>On duty each day</a:t>
             </a:r>
             <a:endParaRPr lang="en-US" sz="1400" dirty="0"/>
           </a:p>
@@ -6559,7 +6559,7 @@
                 <a:ea typeface="Inter" pitchFamily="34" charset="-122"/>
                 <a:cs typeface="Inter" pitchFamily="34" charset="-120"/>
               </a:rPr>
-              <a:t>All three shortlisted: about 14 full weekends off a year (today 10), at most 5 apart</a:t>
+              <a:t>All three shortlisted: 14 full weekends off a year (today 10), at most 5 weeks apart</a:t>
             </a:r>
             <a:endParaRPr lang="en-US" sz="1500" dirty="0"/>
           </a:p>
@@ -6971,7 +6971,7 @@
                 <a:ea typeface="Inter" pitchFamily="34" charset="-122"/>
                 <a:cs typeface="Inter" pitchFamily="34" charset="-120"/>
               </a:rPr>
-              <a:t>Costs: 40 weekday earlies a year over 8h 30m; four weeks off 15 days, not 14</a:t>
+              <a:t>This one costs: 40 weekday earlies a year over 8h 30m, the most of the three</a:t>
             </a:r>
             <a:endParaRPr lang="en-US" sz="1500" dirty="0"/>
           </a:p>
@@ -7037,7 +7037,7 @@
                 <a:ea typeface="Inter" pitchFamily="34" charset="-122"/>
                 <a:cs typeface="Inter" pitchFamily="34" charset="-120"/>
               </a:rPr>
-              <a:t>Late finishes: 42 a year each (today 39) — the rules’ minimum. The colleague deck shows every cost openly.</a:t>
+              <a:t>All three: two more Saturdays a year, four weeks off for 15 days’ leave, and late finishes — 42 a year at 23:00 or later (today 39), 94 at 22:00 or later (today 78).</a:t>
             </a:r>
             <a:endParaRPr lang="en-US" sz="1400" dirty="0"/>
           </a:p>
@@ -7544,7 +7544,7 @@
                 <a:ea typeface="Inter" pitchFamily="34" charset="-122"/>
                 <a:cs typeface="Inter" pitchFamily="34" charset="-120"/>
               </a:rPr>
-              <a:t>Late finishes: 42 a year (today 39)</a:t>
+              <a:t>Late finishes: 42 a year at 23:00 or later (today 39), 94 at 22:00 or later (today 78)</a:t>
             </a:r>
             <a:endParaRPr lang="en-US" sz="1300" dirty="0"/>
           </a:p>
@@ -7610,7 +7610,7 @@
                 <a:ea typeface="Inter" pitchFamily="34" charset="-122"/>
                 <a:cs typeface="Inter" pitchFamily="34" charset="-120"/>
               </a:rPr>
-              <a:t>Best 14-day leave stretch 28 days, not 30</a:t>
+              <a:t>14 days’ leave: at best 28 days off, not 30</a:t>
             </a:r>
             <a:endParaRPr lang="en-US" sz="1300" dirty="0"/>
           </a:p>
@@ -7847,7 +7847,7 @@
                 <a:ea typeface="Inter" pitchFamily="34" charset="-122"/>
                 <a:cs typeface="Inter" pitchFamily="34" charset="-120"/>
               </a:rPr>
-              <a:t>Three things confirmed verbally, two decisions left, two points still open</a:t>
+              <a:t>Three things settled, two decisions left, two points still open</a:t>
             </a:r>
             <a:endParaRPr lang="en-US" sz="1500" dirty="0"/>
           </a:p>

--- a/docs/links-26/presentations/In-Step-for-managers.pptx
+++ b/docs/links-26/presentations/In-Step-for-managers.pptx
@@ -1106,7 +1106,7 @@
           <a:p>
             <a:r>
               <a:rPr lang="en-US" dirty="0"/>
-              <a:t>Today’s link meets 4 of the 9 December rules; In Step meets all 9, and the three flexible ones as well (14 on a Saturday, evenly spaced cover weeks, weekday closers from 15:45). Someone finishing at exactly 22:00 is not counted as still on after 22:00. The floor figure leaves out the ticket office, except at the quiet ends of the day, when one of each pair helps on the floor (on a Sunday both lates, until 15:00). Three to the close every day is the minimum, and In Step rosters exactly that, which is what keeps its late finishes down.</a:t>
+              <a:t>Today’s link meets 4 of the 9 December rules; In Step meets all 9, and the three flexible ones as well (14 on a Saturday, evenly spaced cover weeks, weekday closers from 15:45). Someone finishing at exactly 22:00 is not counted as still on after 22:00. The floor figure leaves out the ticket office, except at the quiet ends of the day, when one of each pair helps on the floor — on a Sunday one early until 09:00, and both lates until 15:00, one of them again from 18:00. Three to the close every day is the minimum, and In Step rosters exactly that, which is what keeps its late finishes down.</a:t>
             </a:r>
             <a:endParaRPr lang="en-US" dirty="0"/>
           </a:p>
@@ -1458,7 +1458,7 @@
           <a:p>
             <a:r>
               <a:rPr lang="en-US" dirty="0"/>
-              <a:t>This is the case in one slide. In Step (30 October 2026) is Closing Time’s weeks with the shift times chosen again, to put five on at every opening Monday to Saturday and to follow the weekday trains more closely. It is on the shortlist with Even Step, the recommended design, and Short Run, and this slide sets it beside both. It meets every December staffing rule and all three flexible ones. Nine of its fifteen shift times are worked today, today’s 13:45 finish among them on every weekday. Nobody works more than five days in a row on the fixed rota, where today it is seven; a cover week placed badly, with its Sunday worked as overtime, can make it seven, never more. Every working week is all earlies or all lates, and 18 of the 21 keep one shift time Monday to Friday; today seven weeks in 16 do both. Its seven full weekends off in 26 weeks are never more than five weeks apart, which is as close as the five cover weeks allow; today it is four in 20, up to seven weeks apart. Its working weeks run from 25h 30m to 41h 05m (today 25h 10m to 43h 50m), the most even of the three, and the shortest rest is 14h 35m. Even Step is these same weeks with no shift over 8h 30m Monday to Saturday; against it In Step’s weekday lates are shorter (8h 12m on average, closers aside, against 8h 27m), its working day moves less from one week to the next (1h 13m on average, against 1h 31m) and its weekday fit to the trains is closer (29.8 against 32.6), and the price is its two new weekday earlies, 8h 55m and 8h 45m, which come round about 20 times a year each, 40 in all, where Even Step has none over 8h 30m and neither has today. Against Short Run it has the same run, weekends, weeks on one shift time, late finishes and leave; it adds today’s 13:45, an 8h 10m Saturday closer (Short Run’s is 8h 40m) and more even weeks (Short Run’s run from 24h 30m to 42h 30m), and its fit to the trains is the closer with the three days’ scores added together, though counted day by day across a week Short Run’s is a shade closer (26.7 against 26.8), as it is on weekdays alone; Short Run has 20 weekday earlies a year over 8h 30m, at 9h 00m. The other honest costs: its Saturday closer is a new time on a Saturday, where Short Run has none; finishes at 23:00 or later go from about 39 to 42 a year each, the smallest rise possible — the December staffing needs three to the close every day, and only those three finish after 23:00 — and finishes at 22:00 or later from about 78 to 94; and six shift times are new. Every closing shift is 30 to 60 minutes shorter than today’s.</a:t>
+              <a:t>This is the case in one slide. In Step (30 October 2026) takes the weeks of Closing Time, another design in the pack, and chooses the shift times again, to put five on at every opening Monday to Saturday and to follow the weekday trains more closely. It is on the shortlist with Even Step, the recommended design, and Short Run, and this slide sets it beside both. It meets every December staffing rule and all three flexible ones. Nine of its fifteen shift times are worked today, today’s 13:45 finish among them on every weekday. Nobody works more than five days in a row on the fixed rota, where today it is seven; a cover week placed badly, with its Sunday worked as overtime, can make it seven, never more. Every working week is all earlies or all lates, and 18 of the 21 keep one shift time Monday to Friday; today seven weeks in 16 do both. Its seven full weekends off in 26 weeks are never more than five weeks apart, which is as close as the five cover weeks allow; today it is four in 20, up to seven weeks apart. Its working weeks run from 25h 30m to 41h 05m Monday to Saturday (today 25h 10m to 43h 50m), the most even of the three, and the shortest rest is 14h 35m. Even Step is these same weeks with no shift over 8h 30m Monday to Saturday; against it In Step’s weekday lates are shorter (8h 12m on average, closers aside, against 8h 27m), its working day moves less from one week to the next (1h 13m on average, against 1h 31m) and its weekday fit to the trains is closer (29.8 against 32.6), and the price is its two new weekday earlies, 8h 55m and 8h 45m, which come round about 20 times a year each, 40 in all, where neither Even Step nor today has an early over 8h 30m Monday to Saturday. Against Short Run it has the same run, weekends, weeks on one shift time, late finishes and leave; it adds today’s 13:45, an 8h 10m Saturday closer (Short Run’s is 8h 40m) and more even weeks (Short Run’s run from 24h 30m to 42h 30m), and its fit to the trains is the closer with the three days’ scores added together, though counted day by day across a week Short Run’s is a shade closer (26.7 against 26.8), as it is on weekdays alone; Short Run has 20 weekday earlies a year over 8h 30m, at 9h 00m. The other honest costs: its Saturday closer is a new time on a Saturday, where Short Run has none; finishes at 23:00 or later go from about 39 to 42 a year each, the smallest rise possible — the December staffing needs three to the close every day, and only those three finish after 23:00 — and finishes at 22:00 or later from about 78 to 94; and six shift times are new. Every closing shift is 30 to 60 minutes shorter than today’s.</a:t>
             </a:r>
             <a:endParaRPr lang="en-US" dirty="0"/>
           </a:p>
@@ -1546,7 +1546,7 @@
           <a:p>
             <a:r>
               <a:rPr lang="en-US" dirty="0"/>
-              <a:t>Days at work stay at 219 a year (218.6 exactly; Monday to Saturday; Sunday is overtime), under the ceiling set on 1 October 2026. Late finishes average about three more a year each, all of them from the December staffing — three to the close every day, where today has two Monday to Saturday — so no link meeting the same rules on 26 weeks could have fewer. Full weekends off are seven in 26 and never more than five weeks apart; nobody works more than five days in a row on the fixed rota; no week mixes earlies and lates, and 18 of the 21 working weeks keep one shift time. Weekly hours run from 25h 30m to 41h 05m (today 25h 10m to 43h 50m); only the average is the contract. Two new weekday earlies, 06:20–15:15 and 07:00–15:45, are 8h 55m and 8h 45m, each about 20 a year — 40 in all — where today no early is over 8h 30m. The average shift is about two minutes longer.</a:t>
+              <a:t>Days at work stay at 219 a year (218.6 exactly; Monday to Saturday; Sunday is overtime), under the ceiling set on 1 October 2026. Late finishes average about three more a year each, all of them from the December staffing — three to the close every day, where today has two Monday to Saturday — so no link meeting the same rules on 26 weeks could have fewer. Full weekends off are seven in 26 and never more than five weeks apart; nobody works more than five days in a row on the fixed rota; no week mixes earlies and lates, and 18 of the 21 working weeks keep one shift time. Weekly hours, Monday to Saturday, run from 25h 30m to 41h 05m (today 25h 10m to 43h 50m); only the average is the contract. Two new weekday earlies, 06:20–15:15 and 07:00–15:45, are 8h 55m and 8h 45m, each about 20 a year — 40 in all — where today no early is over 8h 30m. The average shift is about two minutes longer.</a:t>
             </a:r>
             <a:endParaRPr lang="en-US" dirty="0"/>
           </a:p>
@@ -6765,7 +6765,7 @@
                 <a:ea typeface="Inter" pitchFamily="34" charset="-122"/>
                 <a:cs typeface="Inter" pitchFamily="34" charset="-120"/>
               </a:rPr>
-              <a:t>This one adds: no week over 41h 05m, and the closest Saturday fit</a:t>
+              <a:t>This one adds: no Mon–Sat week over 41h 05m, and the closest Saturday fit</a:t>
             </a:r>
             <a:endParaRPr lang="en-US" sz="1500" dirty="0"/>
           </a:p>
@@ -7632,7 +7632,7 @@
                 <a:ea typeface="Inter" pitchFamily="34" charset="-122"/>
                 <a:cs typeface="Inter" pitchFamily="34" charset="-120"/>
               </a:rPr>
-              <a:t>Four weeks off needs 15 days’ leave, not 14</a:t>
+              <a:t>Four weeks off in a row: 15 days’ leave, not 14</a:t>
             </a:r>
             <a:endParaRPr lang="en-US" sz="1300" dirty="0"/>
           </a:p>

--- a/docs/links-26/presentations/In-Step-for-managers.pptx
+++ b/docs/links-26/presentations/In-Step-for-managers.pptx
@@ -1018,7 +1018,7 @@
           <a:p>
             <a:r>
               <a:rPr lang="en-US" dirty="0"/>
-              <a:t>The nine rules are the December 2026 rules, as confirmed verbally on 29 September 2026: at least four at the open, three to the close, five after 22:00, 10 on a Sunday, the ticket office in fixed pairs, two on the floor at all times, handovers, 8–9 hour Sundays and no more shift times than today. Behind them sit three flexible rules that are aimed for when designing but not scored on: 14 on a Saturday, five cover weeks as evenly spaced as 26 weeks allow, and weekday closers starting at 15:45. In Step meets all three. It also stays under the ceiling of 219 contracted days a year set on 1 October 2026, at 218.6.</a:t>
+              <a:t>The nine rules are the December 2026 rules, as confirmed verbally on 29 September 2026: at least four at the open, three to the close, five after 22:00, 10 on a Sunday, the ticket office in fixed pairs, two on the floor at all times, handovers, 8–9 hour Sundays and no more shift times than today. Behind them sit three flexible rules that are aimed for when designing but not scored on: 14 on a Saturday, five cover weeks as evenly spaced as 26 weeks allow, and weekday closers starting at 15:45 or later. In Step meets all three. It also stays under the ceiling of 219 contracted days a year set on 1 October 2026, at 218.6.</a:t>
             </a:r>
             <a:endParaRPr lang="en-US" dirty="0"/>
           </a:p>
@@ -1106,7 +1106,7 @@
           <a:p>
             <a:r>
               <a:rPr lang="en-US" dirty="0"/>
-              <a:t>Today’s link meets 4 of the 9 December rules; In Step meets all 9, and the three flexible ones as well (14 on a Saturday, evenly spaced cover weeks, 15:45 weekday closers). Someone finishing at exactly 22:00 is not counted as still on after 22:00. The floor figure leaves out the ticket office, except its second person at the quiet ends of the day. Three to the close every day is the minimum, and In Step rosters exactly that, which is what keeps its late finishes down.</a:t>
+              <a:t>Today’s link meets 4 of the 9 December rules; In Step meets all 9, and the three flexible ones as well (14 on a Saturday, evenly spaced cover weeks, weekday closers from 15:45). Someone finishing at exactly 22:00 is not counted as still on after 22:00. The floor figure leaves out the ticket office, except at the quiet ends of the day, when one of each pair helps on the floor — on a Sunday one early until 09:00, and both lates until 15:00, one of them again from 18:00. Three to the close every day is the minimum, and In Step rosters exactly that, which is what keeps its late finishes down.</a:t>
             </a:r>
             <a:endParaRPr lang="en-US" dirty="0"/>
           </a:p>
@@ -1458,7 +1458,7 @@
           <a:p>
             <a:r>
               <a:rPr lang="en-US" dirty="0"/>
-              <a:t>This is the case in one slide. In Step (30 October 2026) is Closing Time’s weeks with the shift times chosen again, to put five on at every opening Monday to Saturday and to follow the weekday trains more closely; it is on the shortlist with Short Run, and this slide sets the two side by side. It meets every December staffing rule and all three flexible ones. Nine of its fifteen shift times are worked today, today’s 13:45 finish among them on every weekday. Nobody works more than five days in a row on the fixed rota, where today it is seven; a cover week placed badly, with its Sunday worked as overtime, can make it seven, never more. Every working week is all earlies or all lates, and 18 of the 21 keep one shift time Monday to Friday; today seven weeks in 16 do both. Its seven full weekends off in 26 weeks are never more than five weeks apart, which is as close as the five cover weeks allow; today it is four in 20, up to seven weeks apart. Its working weeks run from 25h 30m to 41h 05m (today 25h 10m to 43h 50m), and the shortest rest is 14h 35m. Against Short Run it has the same run, weekends, weeks on one shift time, late finishes and leave; it adds today’s 13:45, an 8h 10m Saturday closer (Short Run’s is 8h 40m) and more even weeks (Short Run’s run from 24h 30m to 42h 30m), and its fit to the trains is the closer with the three days’ scores added together, though counted day by day across a week Short Run’s is a shade closer (26.7 against 26.8), as it is on weekdays alone. The honest costs: its two new weekday earlies, 8h 55m and 8h 45m, come round about 20 times a year each, 40 in all, where today no early is over 8h 30m and Short Run has 20, at 9h 00m; its Saturday closer is a new time on a Saturday, where Short Run has none; finishes at 23:00 or later go from about 39 to 42 a year each, the smallest rise possible — the December staffing needs three to the close every day, and only those three finish after 23:00 — and finishes at 22:00 or later from about 78 to 94; and six shift times are new. Every closing shift is 30 to 60 minutes shorter than today’s.</a:t>
+              <a:t>This is the case in one slide. In Step (30 October 2026) takes the weeks of Closing Time, another design in the pack, and chooses the shift times again, to put five on at every opening Monday to Saturday and to follow the weekday trains more closely. It is on the shortlist with Even Step, the recommended design, and Short Run, and this slide sets it beside both. It meets every December staffing rule and all three flexible ones. Nine of its fifteen shift times are worked today, today’s 13:45 finish among them on every weekday. Nobody works more than five days in a row on the fixed rota, where today it is seven; a cover week placed badly, with its Sunday worked as overtime, can make it seven, never more. Every working week is all earlies or all lates, and 18 of the 21 keep one shift time Monday to Friday; today seven weeks in 16 do both. Its seven full weekends off in 26 weeks are never more than five weeks apart, which is as close as the five cover weeks allow; today it is four in 20, up to seven weeks apart. Its working weeks run from 25h 30m to 41h 05m Monday to Saturday (today 25h 10m to 43h 50m), the most even of the three, and the shortest rest is 14h 35m. Even Step is these same weeks with no shift over 8h 30m Monday to Saturday; against it In Step’s weekday lates are shorter (8h 12m on average, closers aside, against 8h 27m), its working day moves less from one week to the next (1h 13m on average, against 1h 31m) and its weekday fit to the trains is closer (29.8 against 32.6), and the price is its two new weekday earlies, 8h 55m and 8h 45m, which come round about 20 times a year each, 40 in all, where neither Even Step nor today has an early over 8h 30m Monday to Saturday. Against Short Run it has the same run, weekends, weeks on one shift time, late finishes and leave; it adds today’s 13:45, an 8h 10m Saturday closer (Short Run’s is 8h 40m) and more even weeks (Short Run’s run from 24h 30m to 42h 30m), and its fit to the trains is the closer with the three days’ scores added together, though counted day by day across a week Short Run’s is a shade closer (26.7 against 26.8), as it is on weekdays alone; Short Run has 20 weekday earlies a year over 8h 30m, at 9h 00m. The other honest costs: its Saturday closer is a new time on a Saturday, where Short Run has none; finishes at 23:00 or later go from about 39 to 42 a year each, the smallest rise possible — the December staffing needs three to the close every day, and only those three finish after 23:00 — and finishes at 22:00 or later from about 78 to 94; and six shift times are new. Every closing shift is 30 to 60 minutes shorter than today’s.</a:t>
             </a:r>
             <a:endParaRPr lang="en-US" dirty="0"/>
           </a:p>
@@ -1546,7 +1546,7 @@
           <a:p>
             <a:r>
               <a:rPr lang="en-US" dirty="0"/>
-              <a:t>Days at work stay at 219 a year (218.6 exactly; Monday to Saturday; Sunday is overtime), under the ceiling set on 1 October 2026. Late finishes average about three more a year each, all of them from the December staffing — three to the close every day, where today has two Monday to Saturday — so no link meeting the same rules on 26 weeks could have fewer. Full weekends off are seven in 26 and never more than five weeks apart; nobody works more than five days in a row on the fixed rota; no week mixes earlies and lates, and 18 of the 21 working weeks keep one shift time. Weekly hours run from 25h 30m to 41h 05m (today 25h 10m to 43h 50m); only the average is the contract. Two new weekday earlies, 06:20–15:15 and 07:00–15:45, are 8h 55m and 8h 45m, each about 20 a year — 40 in all — where today no early is over 8h 30m. The average shift is about two minutes longer.</a:t>
+              <a:t>Days at work stay at 219 a year (218.6 exactly; Monday to Saturday; Sunday is overtime), under the ceiling set on 1 October 2026. Late finishes average about three more a year each, all of them from the December staffing — three to the close every day, where today has two Monday to Saturday — so no link meeting the same rules on 26 weeks could have fewer. Full weekends off are seven in 26 and never more than five weeks apart; nobody works more than five days in a row on the fixed rota; no week mixes earlies and lates, and 18 of the 21 working weeks keep one shift time. Weekly hours, Monday to Saturday, run from 25h 30m to 41h 05m (today 25h 10m to 43h 50m); only the average is the contract. Two new weekday earlies, 06:20–15:15 and 07:00–15:45, are 8h 55m and 8h 45m, each about 20 a year — 40 in all — where today no early is over 8h 30m. The average shift is about two minutes longer.</a:t>
             </a:r>
             <a:endParaRPr lang="en-US" dirty="0"/>
           </a:p>
@@ -2682,7 +2682,7 @@
                 <a:ea typeface="Inter" pitchFamily="34" charset="-122"/>
                 <a:cs typeface="Inter" pitchFamily="34" charset="-120"/>
               </a:rPr>
-              <a:t>today’s link: 4</a:t>
+              <a:t>today 4</a:t>
             </a:r>
             <a:endParaRPr lang="en-US" sz="1300" dirty="0"/>
           </a:p>
@@ -3156,7 +3156,7 @@
                 <a:ea typeface="Inter" pitchFamily="34" charset="-122"/>
                 <a:cs typeface="Inter" pitchFamily="34" charset="-120"/>
               </a:rPr>
-              <a:t>today: 20</a:t>
+              <a:t>today 20</a:t>
             </a:r>
             <a:endParaRPr lang="en-US" sz="1300" dirty="0"/>
           </a:p>
@@ -3515,7 +3515,7 @@
                 <a:ea typeface="Inter" pitchFamily="34" charset="-122"/>
                 <a:cs typeface="Inter" pitchFamily="34" charset="-120"/>
               </a:rPr>
-              <a:t>On duty during the day</a:t>
+              <a:t>On duty each day</a:t>
             </a:r>
             <a:endParaRPr lang="en-US" sz="1400" dirty="0"/>
           </a:p>
@@ -4708,11 +4708,11 @@
         <p:spPr>
           <a:xfrm>
             <a:off x="457200" y="1801368"/>
-            <a:ext cx="8229600" cy="365760"/>
+            <a:ext cx="8229600" cy="461176"/>
           </a:xfrm>
           <a:prstGeom prst="roundRect">
             <a:avLst>
-              <a:gd name="adj" fmla="val 11538"/>
+              <a:gd name="adj" fmla="val 9151"/>
             </a:avLst>
           </a:prstGeom>
           <a:solidFill>
@@ -4735,7 +4735,7 @@
         <p:spPr>
           <a:xfrm>
             <a:off x="640080" y="1801368"/>
-            <a:ext cx="4023360" cy="365760"/>
+            <a:ext cx="4023360" cy="461176"/>
           </a:xfrm>
           <a:prstGeom prst="rect">
             <a:avLst/>
@@ -4774,7 +4774,7 @@
         <p:spPr>
           <a:xfrm>
             <a:off x="4663440" y="1801368"/>
-            <a:ext cx="2011680" cy="365760"/>
+            <a:ext cx="2011680" cy="461176"/>
           </a:xfrm>
           <a:prstGeom prst="rect">
             <a:avLst/>
@@ -4813,7 +4813,7 @@
         <p:spPr>
           <a:xfrm>
             <a:off x="6675120" y="1801368"/>
-            <a:ext cx="2011680" cy="365760"/>
+            <a:ext cx="2011680" cy="461176"/>
           </a:xfrm>
           <a:prstGeom prst="rect">
             <a:avLst/>
@@ -4851,12 +4851,12 @@
         </p:nvSpPr>
         <p:spPr>
           <a:xfrm>
-            <a:off x="457200" y="2240280"/>
-            <a:ext cx="8229600" cy="365760"/>
+            <a:off x="457200" y="2354779"/>
+            <a:ext cx="8229600" cy="461176"/>
           </a:xfrm>
           <a:prstGeom prst="roundRect">
             <a:avLst>
-              <a:gd name="adj" fmla="val 11538"/>
+              <a:gd name="adj" fmla="val 9151"/>
             </a:avLst>
           </a:prstGeom>
           <a:solidFill>
@@ -4878,8 +4878,8 @@
         </p:nvSpPr>
         <p:spPr>
           <a:xfrm>
-            <a:off x="640080" y="2240280"/>
-            <a:ext cx="4023360" cy="365760"/>
+            <a:off x="640080" y="2354779"/>
+            <a:ext cx="4023360" cy="461176"/>
           </a:xfrm>
           <a:prstGeom prst="rect">
             <a:avLst/>
@@ -4917,8 +4917,8 @@
         </p:nvSpPr>
         <p:spPr>
           <a:xfrm>
-            <a:off x="4663440" y="2240280"/>
-            <a:ext cx="2011680" cy="365760"/>
+            <a:off x="4663440" y="2354779"/>
+            <a:ext cx="2011680" cy="461176"/>
           </a:xfrm>
           <a:prstGeom prst="rect">
             <a:avLst/>
@@ -4956,8 +4956,8 @@
         </p:nvSpPr>
         <p:spPr>
           <a:xfrm>
-            <a:off x="6675120" y="2240280"/>
-            <a:ext cx="2011680" cy="365760"/>
+            <a:off x="6675120" y="2354779"/>
+            <a:ext cx="2011680" cy="461176"/>
           </a:xfrm>
           <a:prstGeom prst="rect">
             <a:avLst/>
@@ -4995,12 +4995,12 @@
         </p:nvSpPr>
         <p:spPr>
           <a:xfrm>
-            <a:off x="457200" y="2679192"/>
-            <a:ext cx="8229600" cy="365760"/>
+            <a:off x="457200" y="2908190"/>
+            <a:ext cx="8229600" cy="461176"/>
           </a:xfrm>
           <a:prstGeom prst="roundRect">
             <a:avLst>
-              <a:gd name="adj" fmla="val 11538"/>
+              <a:gd name="adj" fmla="val 9151"/>
             </a:avLst>
           </a:prstGeom>
           <a:solidFill>
@@ -5022,8 +5022,8 @@
         </p:nvSpPr>
         <p:spPr>
           <a:xfrm>
-            <a:off x="640080" y="2679192"/>
-            <a:ext cx="4023360" cy="365760"/>
+            <a:off x="640080" y="2908190"/>
+            <a:ext cx="4023360" cy="461176"/>
           </a:xfrm>
           <a:prstGeom prst="rect">
             <a:avLst/>
@@ -5061,8 +5061,8 @@
         </p:nvSpPr>
         <p:spPr>
           <a:xfrm>
-            <a:off x="4663440" y="2679192"/>
-            <a:ext cx="2011680" cy="365760"/>
+            <a:off x="4663440" y="2908190"/>
+            <a:ext cx="2011680" cy="461176"/>
           </a:xfrm>
           <a:prstGeom prst="rect">
             <a:avLst/>
@@ -5100,8 +5100,8 @@
         </p:nvSpPr>
         <p:spPr>
           <a:xfrm>
-            <a:off x="6675120" y="2679192"/>
-            <a:ext cx="2011680" cy="365760"/>
+            <a:off x="6675120" y="2908190"/>
+            <a:ext cx="2011680" cy="461176"/>
           </a:xfrm>
           <a:prstGeom prst="rect">
             <a:avLst/>
@@ -5139,12 +5139,12 @@
         </p:nvSpPr>
         <p:spPr>
           <a:xfrm>
-            <a:off x="457200" y="3118104"/>
-            <a:ext cx="8229600" cy="365760"/>
+            <a:off x="457200" y="3461601"/>
+            <a:ext cx="8229600" cy="461176"/>
           </a:xfrm>
           <a:prstGeom prst="roundRect">
             <a:avLst>
-              <a:gd name="adj" fmla="val 11538"/>
+              <a:gd name="adj" fmla="val 9151"/>
             </a:avLst>
           </a:prstGeom>
           <a:solidFill>
@@ -5166,8 +5166,8 @@
         </p:nvSpPr>
         <p:spPr>
           <a:xfrm>
-            <a:off x="640080" y="3118104"/>
-            <a:ext cx="4023360" cy="365760"/>
+            <a:off x="640080" y="3461601"/>
+            <a:ext cx="4023360" cy="461176"/>
           </a:xfrm>
           <a:prstGeom prst="rect">
             <a:avLst/>
@@ -5205,8 +5205,8 @@
         </p:nvSpPr>
         <p:spPr>
           <a:xfrm>
-            <a:off x="4663440" y="3118104"/>
-            <a:ext cx="2011680" cy="365760"/>
+            <a:off x="4663440" y="3461601"/>
+            <a:ext cx="2011680" cy="461176"/>
           </a:xfrm>
           <a:prstGeom prst="rect">
             <a:avLst/>
@@ -5244,8 +5244,8 @@
         </p:nvSpPr>
         <p:spPr>
           <a:xfrm>
-            <a:off x="6675120" y="3118104"/>
-            <a:ext cx="2011680" cy="365760"/>
+            <a:off x="6675120" y="3461601"/>
+            <a:ext cx="2011680" cy="461176"/>
           </a:xfrm>
           <a:prstGeom prst="rect">
             <a:avLst/>
@@ -5577,11 +5577,11 @@
         <p:spPr>
           <a:xfrm>
             <a:off x="457200" y="1801368"/>
-            <a:ext cx="8229600" cy="365760"/>
+            <a:ext cx="8229600" cy="461176"/>
           </a:xfrm>
           <a:prstGeom prst="roundRect">
             <a:avLst>
-              <a:gd name="adj" fmla="val 11538"/>
+              <a:gd name="adj" fmla="val 9151"/>
             </a:avLst>
           </a:prstGeom>
           <a:solidFill>
@@ -5604,7 +5604,7 @@
         <p:spPr>
           <a:xfrm>
             <a:off x="640080" y="1801368"/>
-            <a:ext cx="4023360" cy="365760"/>
+            <a:ext cx="4023360" cy="461176"/>
           </a:xfrm>
           <a:prstGeom prst="rect">
             <a:avLst/>
@@ -5643,7 +5643,7 @@
         <p:spPr>
           <a:xfrm>
             <a:off x="4663440" y="1801368"/>
-            <a:ext cx="2011680" cy="365760"/>
+            <a:ext cx="2011680" cy="461176"/>
           </a:xfrm>
           <a:prstGeom prst="rect">
             <a:avLst/>
@@ -5682,7 +5682,7 @@
         <p:spPr>
           <a:xfrm>
             <a:off x="6675120" y="1801368"/>
-            <a:ext cx="2011680" cy="365760"/>
+            <a:ext cx="2011680" cy="461176"/>
           </a:xfrm>
           <a:prstGeom prst="rect">
             <a:avLst/>
@@ -5720,12 +5720,12 @@
         </p:nvSpPr>
         <p:spPr>
           <a:xfrm>
-            <a:off x="457200" y="2240280"/>
-            <a:ext cx="8229600" cy="365760"/>
+            <a:off x="457200" y="2354779"/>
+            <a:ext cx="8229600" cy="461176"/>
           </a:xfrm>
           <a:prstGeom prst="roundRect">
             <a:avLst>
-              <a:gd name="adj" fmla="val 11538"/>
+              <a:gd name="adj" fmla="val 9151"/>
             </a:avLst>
           </a:prstGeom>
           <a:solidFill>
@@ -5747,8 +5747,8 @@
         </p:nvSpPr>
         <p:spPr>
           <a:xfrm>
-            <a:off x="640080" y="2240280"/>
-            <a:ext cx="4023360" cy="365760"/>
+            <a:off x="640080" y="2354779"/>
+            <a:ext cx="4023360" cy="461176"/>
           </a:xfrm>
           <a:prstGeom prst="rect">
             <a:avLst/>
@@ -5786,8 +5786,8 @@
         </p:nvSpPr>
         <p:spPr>
           <a:xfrm>
-            <a:off x="4663440" y="2240280"/>
-            <a:ext cx="2011680" cy="365760"/>
+            <a:off x="4663440" y="2354779"/>
+            <a:ext cx="2011680" cy="461176"/>
           </a:xfrm>
           <a:prstGeom prst="rect">
             <a:avLst/>
@@ -5825,8 +5825,8 @@
         </p:nvSpPr>
         <p:spPr>
           <a:xfrm>
-            <a:off x="6675120" y="2240280"/>
-            <a:ext cx="2011680" cy="365760"/>
+            <a:off x="6675120" y="2354779"/>
+            <a:ext cx="2011680" cy="461176"/>
           </a:xfrm>
           <a:prstGeom prst="rect">
             <a:avLst/>
@@ -5864,12 +5864,12 @@
         </p:nvSpPr>
         <p:spPr>
           <a:xfrm>
-            <a:off x="457200" y="2679192"/>
-            <a:ext cx="8229600" cy="365760"/>
+            <a:off x="457200" y="2908190"/>
+            <a:ext cx="8229600" cy="461176"/>
           </a:xfrm>
           <a:prstGeom prst="roundRect">
             <a:avLst>
-              <a:gd name="adj" fmla="val 11538"/>
+              <a:gd name="adj" fmla="val 9151"/>
             </a:avLst>
           </a:prstGeom>
           <a:solidFill>
@@ -5891,8 +5891,8 @@
         </p:nvSpPr>
         <p:spPr>
           <a:xfrm>
-            <a:off x="640080" y="2679192"/>
-            <a:ext cx="4023360" cy="365760"/>
+            <a:off x="640080" y="2908190"/>
+            <a:ext cx="4023360" cy="461176"/>
           </a:xfrm>
           <a:prstGeom prst="rect">
             <a:avLst/>
@@ -5930,8 +5930,8 @@
         </p:nvSpPr>
         <p:spPr>
           <a:xfrm>
-            <a:off x="4663440" y="2679192"/>
-            <a:ext cx="2011680" cy="365760"/>
+            <a:off x="4663440" y="2908190"/>
+            <a:ext cx="2011680" cy="461176"/>
           </a:xfrm>
           <a:prstGeom prst="rect">
             <a:avLst/>
@@ -5969,8 +5969,8 @@
         </p:nvSpPr>
         <p:spPr>
           <a:xfrm>
-            <a:off x="6675120" y="2679192"/>
-            <a:ext cx="2011680" cy="365760"/>
+            <a:off x="6675120" y="2908190"/>
+            <a:ext cx="2011680" cy="461176"/>
           </a:xfrm>
           <a:prstGeom prst="rect">
             <a:avLst/>
@@ -6008,12 +6008,12 @@
         </p:nvSpPr>
         <p:spPr>
           <a:xfrm>
-            <a:off x="457200" y="3118104"/>
-            <a:ext cx="8229600" cy="365760"/>
+            <a:off x="457200" y="3461601"/>
+            <a:ext cx="8229600" cy="461176"/>
           </a:xfrm>
           <a:prstGeom prst="roundRect">
             <a:avLst>
-              <a:gd name="adj" fmla="val 11538"/>
+              <a:gd name="adj" fmla="val 9151"/>
             </a:avLst>
           </a:prstGeom>
           <a:solidFill>
@@ -6035,8 +6035,8 @@
         </p:nvSpPr>
         <p:spPr>
           <a:xfrm>
-            <a:off x="640080" y="3118104"/>
-            <a:ext cx="4023360" cy="365760"/>
+            <a:off x="640080" y="3461601"/>
+            <a:ext cx="4023360" cy="461176"/>
           </a:xfrm>
           <a:prstGeom prst="rect">
             <a:avLst/>
@@ -6074,8 +6074,8 @@
         </p:nvSpPr>
         <p:spPr>
           <a:xfrm>
-            <a:off x="4663440" y="3118104"/>
-            <a:ext cx="2011680" cy="365760"/>
+            <a:off x="4663440" y="3461601"/>
+            <a:ext cx="2011680" cy="461176"/>
           </a:xfrm>
           <a:prstGeom prst="rect">
             <a:avLst/>
@@ -6113,8 +6113,8 @@
         </p:nvSpPr>
         <p:spPr>
           <a:xfrm>
-            <a:off x="6675120" y="3118104"/>
-            <a:ext cx="2011680" cy="365760"/>
+            <a:off x="6675120" y="3461601"/>
+            <a:ext cx="2011680" cy="461176"/>
           </a:xfrm>
           <a:prstGeom prst="rect">
             <a:avLst/>
@@ -6353,7 +6353,7 @@
                 <a:ea typeface="Inter" pitchFamily="34" charset="-122"/>
                 <a:cs typeface="Inter" pitchFamily="34" charset="-120"/>
               </a:rPr>
-              <a:t>What both shortlisted links give, what this one adds, and what it costs</a:t>
+              <a:t>What all three shortlisted links give, what this one adds, and what it costs</a:t>
             </a:r>
             <a:endParaRPr lang="en-US" sz="1500" dirty="0"/>
           </a:p>
@@ -6456,7 +6456,7 @@
                 <a:ea typeface="Inter" pitchFamily="34" charset="-122"/>
                 <a:cs typeface="Inter" pitchFamily="34" charset="-120"/>
               </a:rPr>
-              <a:t>Both shortlisted: all 9 December rules; no avoidable fatigue warning, fixed rota</a:t>
+              <a:t>All three shortlisted: all 9 December rules; no avoidable fatigue warning, fixed rota</a:t>
             </a:r>
             <a:endParaRPr lang="en-US" sz="1500" dirty="0"/>
           </a:p>
@@ -6559,7 +6559,7 @@
                 <a:ea typeface="Inter" pitchFamily="34" charset="-122"/>
                 <a:cs typeface="Inter" pitchFamily="34" charset="-120"/>
               </a:rPr>
-              <a:t>Both shortlisted: about 14 full weekends off a year (today 10), at most 5 apart</a:t>
+              <a:t>All three shortlisted: 14 full weekends off a year (today 10), at most 5 weeks apart</a:t>
             </a:r>
             <a:endParaRPr lang="en-US" sz="1500" dirty="0"/>
           </a:p>
@@ -6662,7 +6662,7 @@
                 <a:ea typeface="Inter" pitchFamily="34" charset="-122"/>
                 <a:cs typeface="Inter" pitchFamily="34" charset="-120"/>
               </a:rPr>
-              <a:t>Both shortlisted: no shift over 9 hours, and every closing shift shorter</a:t>
+              <a:t>All three shortlisted: no shift over 9 hours, and every closing shift shorter</a:t>
             </a:r>
             <a:endParaRPr lang="en-US" sz="1500" dirty="0"/>
           </a:p>
@@ -6765,7 +6765,7 @@
                 <a:ea typeface="Inter" pitchFamily="34" charset="-122"/>
                 <a:cs typeface="Inter" pitchFamily="34" charset="-120"/>
               </a:rPr>
-              <a:t>This one adds: today’s 13:45, an 8h 10m Saturday closer, no week over 41h 05m</a:t>
+              <a:t>This one adds: no Mon–Sat week over 41h 05m, and the closest Saturday fit</a:t>
             </a:r>
             <a:endParaRPr lang="en-US" sz="1500" dirty="0"/>
           </a:p>
@@ -6868,7 +6868,7 @@
                 <a:ea typeface="Inter" pitchFamily="34" charset="-122"/>
                 <a:cs typeface="Inter" pitchFamily="34" charset="-120"/>
               </a:rPr>
-              <a:t>9 of 15 shift times worked today; 6 new, three shorter versions of today’s lates</a:t>
+              <a:t>9 of 15 shift times worked today; 6 new, 3 of them shorter versions of today’s lates</a:t>
             </a:r>
             <a:endParaRPr lang="en-US" sz="1500" dirty="0"/>
           </a:p>
@@ -6971,7 +6971,7 @@
                 <a:ea typeface="Inter" pitchFamily="34" charset="-122"/>
                 <a:cs typeface="Inter" pitchFamily="34" charset="-120"/>
               </a:rPr>
-              <a:t>Costs: 40 weekday earlies a year over 8h 30m; four weeks off 15 days, not 14</a:t>
+              <a:t>This one costs: 40 weekday earlies a year over 8h 30m, the most of the three</a:t>
             </a:r>
             <a:endParaRPr lang="en-US" sz="1500" dirty="0"/>
           </a:p>
@@ -7037,7 +7037,7 @@
                 <a:ea typeface="Inter" pitchFamily="34" charset="-122"/>
                 <a:cs typeface="Inter" pitchFamily="34" charset="-120"/>
               </a:rPr>
-              <a:t>Late finishes: 42 a year each (today 39) — the rules’ minimum. The colleague deck shows every cost openly.</a:t>
+              <a:t>All three: two more Saturdays a year, four weeks off for 15 days’ leave, and late finishes — 42 a year at 23:00 or later (today 39), 94 at 22:00 or later (today 78).</a:t>
             </a:r>
             <a:endParaRPr lang="en-US" sz="1400" dirty="0"/>
           </a:p>
@@ -7544,7 +7544,7 @@
                 <a:ea typeface="Inter" pitchFamily="34" charset="-122"/>
                 <a:cs typeface="Inter" pitchFamily="34" charset="-120"/>
               </a:rPr>
-              <a:t>Late finishes: 42 a year (today 39)</a:t>
+              <a:t>Late finishes: 42 a year at 23:00 or later (today 39), 94 at 22:00 or later (today 78)</a:t>
             </a:r>
             <a:endParaRPr lang="en-US" sz="1300" dirty="0"/>
           </a:p>
@@ -7610,7 +7610,7 @@
                 <a:ea typeface="Inter" pitchFamily="34" charset="-122"/>
                 <a:cs typeface="Inter" pitchFamily="34" charset="-120"/>
               </a:rPr>
-              <a:t>Best 14-day leave stretch 28 days, not 30</a:t>
+              <a:t>14 days’ leave: at best 28 days off, not 30</a:t>
             </a:r>
             <a:endParaRPr lang="en-US" sz="1300" dirty="0"/>
           </a:p>
@@ -7632,7 +7632,7 @@
                 <a:ea typeface="Inter" pitchFamily="34" charset="-122"/>
                 <a:cs typeface="Inter" pitchFamily="34" charset="-120"/>
               </a:rPr>
-              <a:t>Four weeks off needs 15 days’ leave, not 14</a:t>
+              <a:t>Four weeks off in a row: 15 days’ leave, not 14</a:t>
             </a:r>
             <a:endParaRPr lang="en-US" sz="1300" dirty="0"/>
           </a:p>
@@ -7847,7 +7847,7 @@
                 <a:ea typeface="Inter" pitchFamily="34" charset="-122"/>
                 <a:cs typeface="Inter" pitchFamily="34" charset="-120"/>
               </a:rPr>
-              <a:t>Three things confirmed verbally, two decisions left, two points still open</a:t>
+              <a:t>Three things settled, two decisions left, two points still open</a:t>
             </a:r>
             <a:endParaRPr lang="en-US" sz="1500" dirty="0"/>
           </a:p>
